--- a/dist/salesbook-generator-guide.pptx
+++ b/dist/salesbook-generator-guide.pptx
@@ -22,9 +22,10 @@
     <p:sldId id="270" r:id="rId16"/>
     <p:sldId id="271" r:id="rId17"/>
     <p:sldId id="272" r:id="rId18"/>
+    <p:sldId id="273" r:id="rId19"/>
   </p:sldIdLst>
   <p:notesMasterIdLst>
-    <p:notesMasterId r:id="rId19"/>
+    <p:notesMasterId r:id="rId20"/>
   </p:notesMasterIdLst>
   <p:sldSz cx="12192000" cy="6858000"/>
   <p:notesSz cx="6858000" cy="12192000"/>
@@ -123,25 +124,25 @@
   <p:extLst>
     <p:ext uri="{521415D9-36F7-43E2-AB2F-B90AF26B5E84}">
       <p14:sectionLst xmlns:p14="http://schemas.microsoft.com/office/powerpoint/2010/main">
-        <p14:section name="시작" id="{bc588c79-7051-5647-a9f8-ce3e8f0dc7a2}">
+        <p14:section name="시작" id="{08071d9d-ffae-42a7-3085-8dc8660ba0e4}">
           <p14:sldIdLst>
             <p14:sldId id="256"/>
           </p14:sldIdLst>
         </p14:section>
-        <p14:section name="왜 만들었나" id="{c628aa2a-3132-2029-b552-1d3cea6362bb}">
+        <p14:section name="왜 만들었나" id="{95e6c7a3-00cb-3be0-2cd9-1cf65c79983a}">
           <p14:sldIdLst>
             <p14:sldId id="257"/>
             <p14:sldId id="258"/>
             <p14:sldId id="259"/>
           </p14:sldIdLst>
         </p14:section>
-        <p14:section name="사용 가이드" id="{82a4f1f4-00a4-572c-3710-5e52c9503997}">
+        <p14:section name="사용 가이드" id="{033b0a61-dcf4-8985-c0d3-6bdc80b4bfcc}">
           <p14:sldIdLst>
             <p14:sldId id="260"/>
             <p14:sldId id="261"/>
           </p14:sldIdLst>
         </p14:section>
-        <p14:section name="결과물" id="{760e2b40-b9e8-ba82-d22d-defd2569b77b}">
+        <p14:section name="결과물" id="{295b1b6e-c32b-c4db-4c48-136e2856ff19}">
           <p14:sldIdLst>
             <p14:sldId id="262"/>
             <p14:sldId id="263"/>
@@ -152,16 +153,17 @@
             <p14:sldId id="268"/>
           </p14:sldIdLst>
         </p14:section>
-        <p14:section name="원칙과 구조" id="{61220d2d-ef78-00df-7c0e-46be4fa46747}">
+        <p14:section name="원칙과 구조" id="{87767036-eec6-f926-ba65-3ae50e80fcb0}">
           <p14:sldIdLst>
             <p14:sldId id="269"/>
             <p14:sldId id="270"/>
           </p14:sldIdLst>
         </p14:section>
-        <p14:section name="효과와 다음" id="{531546d9-bb47-15d0-cdae-722b82b310e6}">
+        <p14:section name="효과와 다음" id="{b7be1ae1-e540-da71-0aee-c07895eda092}">
           <p14:sldIdLst>
             <p14:sldId id="271"/>
             <p14:sldId id="272"/>
+            <p14:sldId id="273"/>
           </p14:sldIdLst>
         </p14:section>
       </p14:sectionLst>
@@ -1272,7 +1274,7 @@
           <a:p>
             <a:r>
               <a:rPr lang="en-US" dirty="0"/>
-              <a:t/>
+              <a:t>MeAI 리포트 생성 기능의 세부는 담당 부서와 맞춰야 한다. 여기서는 생성기가 넘겨 줄 수 있는 네 가지(데이터 · 입력 구조화 · 출력 틀 · 검증)를 제안한다.</a:t>
             </a:r>
             <a:endParaRPr lang="en-US" dirty="0"/>
           </a:p>
@@ -1296,6 +1298,94 @@
             <a:fld id="{F7021451-1387-4CA6-816F-3879F97B5CBC}" type="slidenum">
               <a:rPr lang="en-US"/>
               <a:t>17</a:t>
+            </a:fld>
+            <a:endParaRPr lang="en-US"/>
+          </a:p>
+        </p:txBody>
+      </p:sp>
+    </p:spTree>
+    <p:extLst>
+      <p:ext uri="{BB962C8B-B14F-4D97-AF65-F5344CB8AC3E}">
+        <p14:creationId xmlns:p14="http://schemas.microsoft.com/office/powerpoint/2010/main" val="1024086991"/>
+      </p:ext>
+    </p:extLst>
+  </p:cSld>
+  <p:clrMapOvr>
+    <a:masterClrMapping/>
+  </p:clrMapOvr>
+</p:notes>
+</file>
+
+<file path=ppt/notesSlides/notesSlide18.xml><?xml version="1.0" encoding="utf-8"?>
+<p:notes xmlns:a="http://schemas.openxmlformats.org/drawingml/2006/main" xmlns:r="http://schemas.openxmlformats.org/officeDocument/2006/relationships" xmlns:p="http://schemas.openxmlformats.org/presentationml/2006/main">
+  <p:cSld>
+    <p:spTree>
+      <p:nvGrpSpPr>
+        <p:cNvPr id="1" name=""/>
+        <p:cNvGrpSpPr/>
+        <p:nvPr/>
+      </p:nvGrpSpPr>
+      <p:grpSpPr>
+        <a:xfrm>
+          <a:off x="0" y="0"/>
+          <a:ext cx="0" cy="0"/>
+          <a:chOff x="0" y="0"/>
+          <a:chExt cx="0" cy="0"/>
+        </a:xfrm>
+      </p:grpSpPr>
+      <p:sp>
+        <p:nvSpPr>
+          <p:cNvPr id="2" name="Slide Image Placeholder 1"/>
+          <p:cNvSpPr>
+            <a:spLocks noGrp="1" noRot="1" noChangeAspect="1"/>
+          </p:cNvSpPr>
+          <p:nvPr>
+            <p:ph type="sldImg"/>
+          </p:nvPr>
+        </p:nvSpPr>
+        <p:spPr/>
+      </p:sp>
+      <p:sp>
+        <p:nvSpPr>
+          <p:cNvPr id="3" name="Notes Placeholder 2"/>
+          <p:cNvSpPr>
+            <a:spLocks noGrp="1"/>
+          </p:cNvSpPr>
+          <p:nvPr>
+            <p:ph type="body" idx="1"/>
+          </p:nvPr>
+        </p:nvSpPr>
+        <p:spPr/>
+        <p:txBody>
+          <a:bodyPr/>
+          <a:lstStyle/>
+          <a:p>
+            <a:r>
+              <a:rPr lang="en-US" dirty="0"/>
+              <a:t/>
+            </a:r>
+            <a:endParaRPr lang="en-US" dirty="0"/>
+          </a:p>
+        </p:txBody>
+      </p:sp>
+      <p:sp>
+        <p:nvSpPr>
+          <p:cNvPr id="4" name="Slide Number Placeholder 3"/>
+          <p:cNvSpPr>
+            <a:spLocks noGrp="1"/>
+          </p:cNvSpPr>
+          <p:nvPr>
+            <p:ph type="sldNum" sz="quarter" idx="10"/>
+          </p:nvPr>
+        </p:nvSpPr>
+        <p:spPr/>
+        <p:txBody>
+          <a:bodyPr/>
+          <a:lstStyle/>
+          <a:p>
+            <a:fld id="{F7021451-1387-4CA6-816F-3879F97B5CBC}" type="slidenum">
+              <a:rPr lang="en-US"/>
+              <a:t>18</a:t>
             </a:fld>
             <a:endParaRPr lang="en-US"/>
           </a:p>
@@ -3001,7 +3091,7 @@
       </p:sp>
       <p:sp>
         <p:nvSpPr>
-          <p:cNvPr id="4" name="frame-162"/>
+          <p:cNvPr id="4" name="frame-163"/>
           <p:cNvSpPr/>
           <p:nvPr/>
         </p:nvSpPr>
@@ -3035,7 +3125,7 @@
       </p:sp>
       <p:pic>
         <p:nvPicPr>
-          <p:cNvPr id="5" name="pic-163" descr="shots/page_03.png">    </p:cNvPr>
+          <p:cNvPr id="5" name="pic-164" descr="shots/page_03.png">    </p:cNvPr>
           <p:cNvPicPr>
             <a:picLocks noChangeAspect="1"/>
           </p:cNvPicPr>
@@ -3059,7 +3149,7 @@
       </p:pic>
       <p:sp>
         <p:nvSpPr>
-          <p:cNvPr id="6" name="circ-164"/>
+          <p:cNvPr id="6" name="circ-165"/>
           <p:cNvSpPr/>
           <p:nvPr/>
         </p:nvSpPr>
@@ -3084,7 +3174,7 @@
       </p:sp>
       <p:pic>
         <p:nvPicPr>
-          <p:cNvPr id="7" name="icon-165" descr="icons/bulb_b.png">    </p:cNvPr>
+          <p:cNvPr id="7" name="icon-166" descr="icons/bulb_b.png">    </p:cNvPr>
           <p:cNvPicPr>
             <a:picLocks noChangeAspect="1"/>
           </p:cNvPicPr>
@@ -3108,7 +3198,7 @@
       </p:pic>
       <p:sp>
         <p:nvSpPr>
-          <p:cNvPr id="8" name="text-166"/>
+          <p:cNvPr id="8" name="text-167"/>
           <p:cNvSpPr txBox="1"/>
           <p:nvPr/>
         </p:nvSpPr>
@@ -3144,7 +3234,7 @@
       </p:sp>
       <p:sp>
         <p:nvSpPr>
-          <p:cNvPr id="9" name="text-167"/>
+          <p:cNvPr id="9" name="text-168"/>
           <p:cNvSpPr txBox="1"/>
           <p:nvPr/>
         </p:nvSpPr>
@@ -3180,7 +3270,7 @@
       </p:sp>
       <p:sp>
         <p:nvSpPr>
-          <p:cNvPr id="10" name="circ-168"/>
+          <p:cNvPr id="10" name="circ-169"/>
           <p:cNvSpPr/>
           <p:nvPr/>
         </p:nvSpPr>
@@ -3205,7 +3295,7 @@
       </p:sp>
       <p:pic>
         <p:nvPicPr>
-          <p:cNvPr id="11" name="icon-169" descr="icons/doc_b.png">    </p:cNvPr>
+          <p:cNvPr id="11" name="icon-170" descr="icons/doc_b.png">    </p:cNvPr>
           <p:cNvPicPr>
             <a:picLocks noChangeAspect="1"/>
           </p:cNvPicPr>
@@ -3229,7 +3319,7 @@
       </p:pic>
       <p:sp>
         <p:nvSpPr>
-          <p:cNvPr id="12" name="text-170"/>
+          <p:cNvPr id="12" name="text-171"/>
           <p:cNvSpPr txBox="1"/>
           <p:nvPr/>
         </p:nvSpPr>
@@ -3265,7 +3355,7 @@
       </p:sp>
       <p:sp>
         <p:nvSpPr>
-          <p:cNvPr id="13" name="text-171"/>
+          <p:cNvPr id="13" name="text-172"/>
           <p:cNvSpPr txBox="1"/>
           <p:nvPr/>
         </p:nvSpPr>
@@ -3301,7 +3391,7 @@
       </p:sp>
       <p:sp>
         <p:nvSpPr>
-          <p:cNvPr id="14" name="circ-172"/>
+          <p:cNvPr id="14" name="circ-173"/>
           <p:cNvSpPr/>
           <p:nvPr/>
         </p:nvSpPr>
@@ -3326,7 +3416,7 @@
       </p:sp>
       <p:pic>
         <p:nvPicPr>
-          <p:cNvPr id="15" name="icon-173" descr="icons/chat_b.png">    </p:cNvPr>
+          <p:cNvPr id="15" name="icon-174" descr="icons/chat_b.png">    </p:cNvPr>
           <p:cNvPicPr>
             <a:picLocks noChangeAspect="1"/>
           </p:cNvPicPr>
@@ -3350,7 +3440,7 @@
       </p:pic>
       <p:sp>
         <p:nvSpPr>
-          <p:cNvPr id="16" name="text-174"/>
+          <p:cNvPr id="16" name="text-175"/>
           <p:cNvSpPr txBox="1"/>
           <p:nvPr/>
         </p:nvSpPr>
@@ -3386,7 +3476,7 @@
       </p:sp>
       <p:sp>
         <p:nvSpPr>
-          <p:cNvPr id="17" name="text-175"/>
+          <p:cNvPr id="17" name="text-176"/>
           <p:cNvSpPr txBox="1"/>
           <p:nvPr/>
         </p:nvSpPr>
@@ -3422,7 +3512,7 @@
       </p:sp>
       <p:sp>
         <p:nvSpPr>
-          <p:cNvPr id="18" name="circ-176"/>
+          <p:cNvPr id="18" name="circ-177"/>
           <p:cNvSpPr/>
           <p:nvPr/>
         </p:nvSpPr>
@@ -3447,7 +3537,7 @@
       </p:sp>
       <p:pic>
         <p:nvPicPr>
-          <p:cNvPr id="19" name="icon-177" descr="icons/layers_b.png">    </p:cNvPr>
+          <p:cNvPr id="19" name="icon-178" descr="icons/layers_b.png">    </p:cNvPr>
           <p:cNvPicPr>
             <a:picLocks noChangeAspect="1"/>
           </p:cNvPicPr>
@@ -3471,7 +3561,7 @@
       </p:pic>
       <p:sp>
         <p:nvSpPr>
-          <p:cNvPr id="20" name="text-178"/>
+          <p:cNvPr id="20" name="text-179"/>
           <p:cNvSpPr txBox="1"/>
           <p:nvPr/>
         </p:nvSpPr>
@@ -3507,7 +3597,7 @@
       </p:sp>
       <p:sp>
         <p:nvSpPr>
-          <p:cNvPr id="21" name="text-179"/>
+          <p:cNvPr id="21" name="text-180"/>
           <p:cNvSpPr txBox="1"/>
           <p:nvPr/>
         </p:nvSpPr>
@@ -3689,7 +3779,7 @@
       </p:sp>
       <p:sp>
         <p:nvSpPr>
-          <p:cNvPr id="4" name="frame-180"/>
+          <p:cNvPr id="4" name="frame-181"/>
           <p:cNvSpPr/>
           <p:nvPr/>
         </p:nvSpPr>
@@ -3723,7 +3813,7 @@
       </p:sp>
       <p:pic>
         <p:nvPicPr>
-          <p:cNvPr id="5" name="pic-181" descr="shots/crop_map.png">    </p:cNvPr>
+          <p:cNvPr id="5" name="pic-182" descr="shots/crop_map.png">    </p:cNvPr>
           <p:cNvPicPr>
             <a:picLocks noChangeAspect="1"/>
           </p:cNvPicPr>
@@ -3747,7 +3837,7 @@
       </p:pic>
       <p:sp>
         <p:nvSpPr>
-          <p:cNvPr id="6" name="dot-182"/>
+          <p:cNvPr id="6" name="dot-183"/>
           <p:cNvSpPr/>
           <p:nvPr/>
         </p:nvSpPr>
@@ -3772,7 +3862,7 @@
       </p:sp>
       <p:sp>
         <p:nvSpPr>
-          <p:cNvPr id="7" name="text-183"/>
+          <p:cNvPr id="7" name="text-184"/>
           <p:cNvSpPr txBox="1"/>
           <p:nvPr/>
         </p:nvSpPr>
@@ -3808,7 +3898,7 @@
       </p:sp>
       <p:sp>
         <p:nvSpPr>
-          <p:cNvPr id="8" name="text-184"/>
+          <p:cNvPr id="8" name="text-185"/>
           <p:cNvSpPr txBox="1"/>
           <p:nvPr/>
         </p:nvSpPr>
@@ -3844,7 +3934,7 @@
       </p:sp>
       <p:sp>
         <p:nvSpPr>
-          <p:cNvPr id="9" name="text-185"/>
+          <p:cNvPr id="9" name="text-186"/>
           <p:cNvSpPr txBox="1"/>
           <p:nvPr/>
         </p:nvSpPr>
@@ -3880,7 +3970,7 @@
       </p:sp>
       <p:sp>
         <p:nvSpPr>
-          <p:cNvPr id="10" name="dot-186"/>
+          <p:cNvPr id="10" name="dot-187"/>
           <p:cNvSpPr/>
           <p:nvPr/>
         </p:nvSpPr>
@@ -3905,7 +3995,7 @@
       </p:sp>
       <p:sp>
         <p:nvSpPr>
-          <p:cNvPr id="11" name="text-187"/>
+          <p:cNvPr id="11" name="text-188"/>
           <p:cNvSpPr txBox="1"/>
           <p:nvPr/>
         </p:nvSpPr>
@@ -3941,7 +4031,7 @@
       </p:sp>
       <p:sp>
         <p:nvSpPr>
-          <p:cNvPr id="12" name="text-188"/>
+          <p:cNvPr id="12" name="text-189"/>
           <p:cNvSpPr txBox="1"/>
           <p:nvPr/>
         </p:nvSpPr>
@@ -3977,7 +4067,7 @@
       </p:sp>
       <p:sp>
         <p:nvSpPr>
-          <p:cNvPr id="13" name="text-189"/>
+          <p:cNvPr id="13" name="text-190"/>
           <p:cNvSpPr txBox="1"/>
           <p:nvPr/>
         </p:nvSpPr>
@@ -4013,7 +4103,7 @@
       </p:sp>
       <p:sp>
         <p:nvSpPr>
-          <p:cNvPr id="14" name="dot-190"/>
+          <p:cNvPr id="14" name="dot-191"/>
           <p:cNvSpPr/>
           <p:nvPr/>
         </p:nvSpPr>
@@ -4038,7 +4128,7 @@
       </p:sp>
       <p:sp>
         <p:nvSpPr>
-          <p:cNvPr id="15" name="text-191"/>
+          <p:cNvPr id="15" name="text-192"/>
           <p:cNvSpPr txBox="1"/>
           <p:nvPr/>
         </p:nvSpPr>
@@ -4074,7 +4164,7 @@
       </p:sp>
       <p:sp>
         <p:nvSpPr>
-          <p:cNvPr id="16" name="text-192"/>
+          <p:cNvPr id="16" name="text-193"/>
           <p:cNvSpPr txBox="1"/>
           <p:nvPr/>
         </p:nvSpPr>
@@ -4110,7 +4200,7 @@
       </p:sp>
       <p:sp>
         <p:nvSpPr>
-          <p:cNvPr id="17" name="text-193"/>
+          <p:cNvPr id="17" name="text-194"/>
           <p:cNvSpPr txBox="1"/>
           <p:nvPr/>
         </p:nvSpPr>
@@ -4146,7 +4236,7 @@
       </p:sp>
       <p:sp>
         <p:nvSpPr>
-          <p:cNvPr id="18" name="text-194"/>
+          <p:cNvPr id="18" name="text-195"/>
           <p:cNvSpPr txBox="1"/>
           <p:nvPr/>
         </p:nvSpPr>
@@ -4328,7 +4418,7 @@
       </p:sp>
       <p:sp>
         <p:nvSpPr>
-          <p:cNvPr id="4" name="frame-195"/>
+          <p:cNvPr id="4" name="frame-196"/>
           <p:cNvSpPr/>
           <p:nvPr/>
         </p:nvSpPr>
@@ -4362,7 +4452,7 @@
       </p:sp>
       <p:pic>
         <p:nvPicPr>
-          <p:cNvPr id="5" name="pic-196" descr="shots/crop_ridertable.png">    </p:cNvPr>
+          <p:cNvPr id="5" name="pic-197" descr="shots/crop_ridertable.png">    </p:cNvPr>
           <p:cNvPicPr>
             <a:picLocks noChangeAspect="1"/>
           </p:cNvPicPr>
@@ -4386,7 +4476,7 @@
       </p:pic>
       <p:sp>
         <p:nvSpPr>
-          <p:cNvPr id="6" name="frame-197"/>
+          <p:cNvPr id="6" name="frame-198"/>
           <p:cNvSpPr/>
           <p:nvPr/>
         </p:nvSpPr>
@@ -4420,7 +4510,7 @@
       </p:sp>
       <p:pic>
         <p:nvPicPr>
-          <p:cNvPr id="7" name="pic-198" descr="shots/crop_kpbox.png">    </p:cNvPr>
+          <p:cNvPr id="7" name="pic-199" descr="shots/crop_kpbox.png">    </p:cNvPr>
           <p:cNvPicPr>
             <a:picLocks noChangeAspect="1"/>
           </p:cNvPicPr>
@@ -4444,7 +4534,7 @@
       </p:pic>
       <p:sp>
         <p:nvSpPr>
-          <p:cNvPr id="8" name="frame-199"/>
+          <p:cNvPr id="8" name="frame-200"/>
           <p:cNvSpPr/>
           <p:nvPr/>
         </p:nvSpPr>
@@ -4478,7 +4568,7 @@
       </p:sp>
       <p:pic>
         <p:nvPicPr>
-          <p:cNvPr id="9" name="pic-200" descr="shots/crop_faq.png">    </p:cNvPr>
+          <p:cNvPr id="9" name="pic-201" descr="shots/crop_faq.png">    </p:cNvPr>
           <p:cNvPicPr>
             <a:picLocks noChangeAspect="1"/>
           </p:cNvPicPr>
@@ -4502,7 +4592,7 @@
       </p:pic>
       <p:sp>
         <p:nvSpPr>
-          <p:cNvPr id="10" name="badge-201"/>
+          <p:cNvPr id="10" name="badge-202"/>
           <p:cNvSpPr/>
           <p:nvPr/>
         </p:nvSpPr>
@@ -4529,7 +4619,7 @@
       </p:sp>
       <p:sp>
         <p:nvSpPr>
-          <p:cNvPr id="11" name="text-202"/>
+          <p:cNvPr id="11" name="text-203"/>
           <p:cNvSpPr txBox="1"/>
           <p:nvPr/>
         </p:nvSpPr>
@@ -4565,7 +4655,7 @@
       </p:sp>
       <p:sp>
         <p:nvSpPr>
-          <p:cNvPr id="12" name="badge-203"/>
+          <p:cNvPr id="12" name="badge-204"/>
           <p:cNvSpPr/>
           <p:nvPr/>
         </p:nvSpPr>
@@ -4592,7 +4682,7 @@
       </p:sp>
       <p:sp>
         <p:nvSpPr>
-          <p:cNvPr id="13" name="text-204"/>
+          <p:cNvPr id="13" name="text-205"/>
           <p:cNvSpPr txBox="1"/>
           <p:nvPr/>
         </p:nvSpPr>
@@ -4628,7 +4718,7 @@
       </p:sp>
       <p:sp>
         <p:nvSpPr>
-          <p:cNvPr id="14" name="text-205"/>
+          <p:cNvPr id="14" name="text-206"/>
           <p:cNvSpPr txBox="1"/>
           <p:nvPr/>
         </p:nvSpPr>
@@ -4664,7 +4754,7 @@
       </p:sp>
       <p:sp>
         <p:nvSpPr>
-          <p:cNvPr id="15" name="text-206"/>
+          <p:cNvPr id="15" name="text-207"/>
           <p:cNvSpPr txBox="1"/>
           <p:nvPr/>
         </p:nvSpPr>
@@ -4700,7 +4790,7 @@
       </p:sp>
       <p:sp>
         <p:nvSpPr>
-          <p:cNvPr id="16" name="text-207"/>
+          <p:cNvPr id="16" name="text-208"/>
           <p:cNvSpPr txBox="1"/>
           <p:nvPr/>
         </p:nvSpPr>
@@ -4736,7 +4826,7 @@
       </p:sp>
       <p:sp>
         <p:nvSpPr>
-          <p:cNvPr id="17" name="text-208"/>
+          <p:cNvPr id="17" name="text-209"/>
           <p:cNvSpPr txBox="1"/>
           <p:nvPr/>
         </p:nvSpPr>
@@ -4772,7 +4862,7 @@
       </p:sp>
       <p:sp>
         <p:nvSpPr>
-          <p:cNvPr id="18" name="text-209"/>
+          <p:cNvPr id="18" name="text-210"/>
           <p:cNvSpPr txBox="1"/>
           <p:nvPr/>
         </p:nvSpPr>
@@ -4808,7 +4898,7 @@
       </p:sp>
       <p:sp>
         <p:nvSpPr>
-          <p:cNvPr id="19" name="text-210"/>
+          <p:cNvPr id="19" name="text-211"/>
           <p:cNvSpPr txBox="1"/>
           <p:nvPr/>
         </p:nvSpPr>
@@ -4844,7 +4934,7 @@
       </p:sp>
       <p:sp>
         <p:nvSpPr>
-          <p:cNvPr id="20" name="text-211"/>
+          <p:cNvPr id="20" name="text-212"/>
           <p:cNvSpPr txBox="1"/>
           <p:nvPr/>
         </p:nvSpPr>
@@ -5026,7 +5116,7 @@
       </p:sp>
       <p:sp>
         <p:nvSpPr>
-          <p:cNvPr id="4" name="frame-212"/>
+          <p:cNvPr id="4" name="frame-213"/>
           <p:cNvSpPr/>
           <p:nvPr/>
         </p:nvSpPr>
@@ -5060,7 +5150,7 @@
       </p:sp>
       <p:pic>
         <p:nvPicPr>
-          <p:cNvPr id="5" name="pic-213" descr="shots/crop_exempt.png">    </p:cNvPr>
+          <p:cNvPr id="5" name="pic-214" descr="shots/crop_exempt.png">    </p:cNvPr>
           <p:cNvPicPr>
             <a:picLocks noChangeAspect="1"/>
           </p:cNvPicPr>
@@ -5084,7 +5174,7 @@
       </p:pic>
       <p:sp>
         <p:nvSpPr>
-          <p:cNvPr id="6" name="circ-214"/>
+          <p:cNvPr id="6" name="circ-215"/>
           <p:cNvSpPr/>
           <p:nvPr/>
         </p:nvSpPr>
@@ -5109,7 +5199,7 @@
       </p:sp>
       <p:pic>
         <p:nvPicPr>
-          <p:cNvPr id="7" name="icon-215" descr="icons/shield_b.png">    </p:cNvPr>
+          <p:cNvPr id="7" name="icon-216" descr="icons/shield_b.png">    </p:cNvPr>
           <p:cNvPicPr>
             <a:picLocks noChangeAspect="1"/>
           </p:cNvPicPr>
@@ -5133,7 +5223,7 @@
       </p:pic>
       <p:sp>
         <p:nvSpPr>
-          <p:cNvPr id="8" name="text-216"/>
+          <p:cNvPr id="8" name="text-217"/>
           <p:cNvSpPr txBox="1"/>
           <p:nvPr/>
         </p:nvSpPr>
@@ -5169,7 +5259,7 @@
       </p:sp>
       <p:sp>
         <p:nvSpPr>
-          <p:cNvPr id="9" name="text-217"/>
+          <p:cNvPr id="9" name="text-218"/>
           <p:cNvSpPr txBox="1"/>
           <p:nvPr/>
         </p:nvSpPr>
@@ -5205,7 +5295,7 @@
       </p:sp>
       <p:sp>
         <p:nvSpPr>
-          <p:cNvPr id="10" name="circ-218"/>
+          <p:cNvPr id="10" name="circ-219"/>
           <p:cNvSpPr/>
           <p:nvPr/>
         </p:nvSpPr>
@@ -5230,7 +5320,7 @@
       </p:sp>
       <p:pic>
         <p:nvPicPr>
-          <p:cNvPr id="11" name="icon-219" descr="icons/bulb_b.png">    </p:cNvPr>
+          <p:cNvPr id="11" name="icon-220" descr="icons/bulb_b.png">    </p:cNvPr>
           <p:cNvPicPr>
             <a:picLocks noChangeAspect="1"/>
           </p:cNvPicPr>
@@ -5254,7 +5344,7 @@
       </p:pic>
       <p:sp>
         <p:nvSpPr>
-          <p:cNvPr id="12" name="text-220"/>
+          <p:cNvPr id="12" name="text-221"/>
           <p:cNvSpPr txBox="1"/>
           <p:nvPr/>
         </p:nvSpPr>
@@ -5290,7 +5380,7 @@
       </p:sp>
       <p:sp>
         <p:nvSpPr>
-          <p:cNvPr id="13" name="text-221"/>
+          <p:cNvPr id="13" name="text-222"/>
           <p:cNvSpPr txBox="1"/>
           <p:nvPr/>
         </p:nvSpPr>
@@ -5326,7 +5416,7 @@
       </p:sp>
       <p:sp>
         <p:nvSpPr>
-          <p:cNvPr id="14" name="circ-222"/>
+          <p:cNvPr id="14" name="circ-223"/>
           <p:cNvSpPr/>
           <p:nvPr/>
         </p:nvSpPr>
@@ -5351,7 +5441,7 @@
       </p:sp>
       <p:pic>
         <p:nvPicPr>
-          <p:cNvPr id="15" name="icon-223" descr="icons/puzzle_b.png">    </p:cNvPr>
+          <p:cNvPr id="15" name="icon-224" descr="icons/puzzle_b.png">    </p:cNvPr>
           <p:cNvPicPr>
             <a:picLocks noChangeAspect="1"/>
           </p:cNvPicPr>
@@ -5375,7 +5465,7 @@
       </p:pic>
       <p:sp>
         <p:nvSpPr>
-          <p:cNvPr id="16" name="text-224"/>
+          <p:cNvPr id="16" name="text-225"/>
           <p:cNvSpPr txBox="1"/>
           <p:nvPr/>
         </p:nvSpPr>
@@ -5411,7 +5501,7 @@
       </p:sp>
       <p:sp>
         <p:nvSpPr>
-          <p:cNvPr id="17" name="text-225"/>
+          <p:cNvPr id="17" name="text-226"/>
           <p:cNvSpPr txBox="1"/>
           <p:nvPr/>
         </p:nvSpPr>
@@ -5447,7 +5537,7 @@
       </p:sp>
       <p:pic>
         <p:nvPicPr>
-          <p:cNvPr id="18" name="pic-226" descr="shots/page_20.png">    </p:cNvPr>
+          <p:cNvPr id="18" name="pic-227" descr="shots/page_20.png">    </p:cNvPr>
           <p:cNvPicPr>
             <a:picLocks noChangeAspect="1"/>
           </p:cNvPicPr>
@@ -5471,7 +5561,7 @@
       </p:pic>
       <p:sp>
         <p:nvSpPr>
-          <p:cNvPr id="19" name="text-227"/>
+          <p:cNvPr id="19" name="text-228"/>
           <p:cNvSpPr txBox="1"/>
           <p:nvPr/>
         </p:nvSpPr>
@@ -5653,7 +5743,7 @@
       </p:sp>
       <p:sp>
         <p:nvSpPr>
-          <p:cNvPr id="4" name="card-228"/>
+          <p:cNvPr id="4" name="card-229"/>
           <p:cNvSpPr/>
           <p:nvPr/>
         </p:nvSpPr>
@@ -5687,7 +5777,7 @@
       </p:sp>
       <p:sp>
         <p:nvSpPr>
-          <p:cNvPr id="5" name="circ-229"/>
+          <p:cNvPr id="5" name="circ-230"/>
           <p:cNvSpPr/>
           <p:nvPr/>
         </p:nvSpPr>
@@ -5712,7 +5802,7 @@
       </p:sp>
       <p:pic>
         <p:nvPicPr>
-          <p:cNvPr id="6" name="icon-230" descr="icons/ban_b.png">    </p:cNvPr>
+          <p:cNvPr id="6" name="icon-231" descr="icons/ban_b.png">    </p:cNvPr>
           <p:cNvPicPr>
             <a:picLocks noChangeAspect="1"/>
           </p:cNvPicPr>
@@ -5736,7 +5826,7 @@
       </p:pic>
       <p:sp>
         <p:nvSpPr>
-          <p:cNvPr id="7" name="text-231"/>
+          <p:cNvPr id="7" name="text-232"/>
           <p:cNvSpPr txBox="1"/>
           <p:nvPr/>
         </p:nvSpPr>
@@ -5772,7 +5862,7 @@
       </p:sp>
       <p:sp>
         <p:nvSpPr>
-          <p:cNvPr id="8" name="text-232"/>
+          <p:cNvPr id="8" name="text-233"/>
           <p:cNvSpPr txBox="1"/>
           <p:nvPr/>
         </p:nvSpPr>
@@ -5811,7 +5901,7 @@
       </p:sp>
       <p:sp>
         <p:nvSpPr>
-          <p:cNvPr id="9" name="card-233"/>
+          <p:cNvPr id="9" name="card-234"/>
           <p:cNvSpPr/>
           <p:nvPr/>
         </p:nvSpPr>
@@ -5845,7 +5935,7 @@
       </p:sp>
       <p:sp>
         <p:nvSpPr>
-          <p:cNvPr id="10" name="circ-234"/>
+          <p:cNvPr id="10" name="circ-235"/>
           <p:cNvSpPr/>
           <p:nvPr/>
         </p:nvSpPr>
@@ -5870,7 +5960,7 @@
       </p:sp>
       <p:pic>
         <p:nvPicPr>
-          <p:cNvPr id="11" name="icon-235" descr="icons/lock_b.png">    </p:cNvPr>
+          <p:cNvPr id="11" name="icon-236" descr="icons/lock_b.png">    </p:cNvPr>
           <p:cNvPicPr>
             <a:picLocks noChangeAspect="1"/>
           </p:cNvPicPr>
@@ -5894,7 +5984,7 @@
       </p:pic>
       <p:sp>
         <p:nvSpPr>
-          <p:cNvPr id="12" name="text-236"/>
+          <p:cNvPr id="12" name="text-237"/>
           <p:cNvSpPr txBox="1"/>
           <p:nvPr/>
         </p:nvSpPr>
@@ -5930,7 +6020,7 @@
       </p:sp>
       <p:sp>
         <p:nvSpPr>
-          <p:cNvPr id="13" name="text-237"/>
+          <p:cNvPr id="13" name="text-238"/>
           <p:cNvSpPr txBox="1"/>
           <p:nvPr/>
         </p:nvSpPr>
@@ -5969,7 +6059,7 @@
       </p:sp>
       <p:sp>
         <p:nvSpPr>
-          <p:cNvPr id="14" name="card-238"/>
+          <p:cNvPr id="14" name="card-239"/>
           <p:cNvSpPr/>
           <p:nvPr/>
         </p:nvSpPr>
@@ -6003,7 +6093,7 @@
       </p:sp>
       <p:sp>
         <p:nvSpPr>
-          <p:cNvPr id="15" name="circ-239"/>
+          <p:cNvPr id="15" name="circ-240"/>
           <p:cNvSpPr/>
           <p:nvPr/>
         </p:nvSpPr>
@@ -6028,7 +6118,7 @@
       </p:sp>
       <p:pic>
         <p:nvPicPr>
-          <p:cNvPr id="16" name="icon-240" descr="icons/scale_b.png">    </p:cNvPr>
+          <p:cNvPr id="16" name="icon-241" descr="icons/scale_b.png">    </p:cNvPr>
           <p:cNvPicPr>
             <a:picLocks noChangeAspect="1"/>
           </p:cNvPicPr>
@@ -6052,7 +6142,7 @@
       </p:pic>
       <p:sp>
         <p:nvSpPr>
-          <p:cNvPr id="17" name="text-241"/>
+          <p:cNvPr id="17" name="text-242"/>
           <p:cNvSpPr txBox="1"/>
           <p:nvPr/>
         </p:nvSpPr>
@@ -6088,7 +6178,7 @@
       </p:sp>
       <p:sp>
         <p:nvSpPr>
-          <p:cNvPr id="18" name="text-242"/>
+          <p:cNvPr id="18" name="text-243"/>
           <p:cNvSpPr txBox="1"/>
           <p:nvPr/>
         </p:nvSpPr>
@@ -6127,7 +6217,7 @@
       </p:sp>
       <p:sp>
         <p:nvSpPr>
-          <p:cNvPr id="19" name="card-243"/>
+          <p:cNvPr id="19" name="card-244"/>
           <p:cNvSpPr/>
           <p:nvPr/>
         </p:nvSpPr>
@@ -6161,7 +6251,7 @@
       </p:sp>
       <p:sp>
         <p:nvSpPr>
-          <p:cNvPr id="20" name="circ-244"/>
+          <p:cNvPr id="20" name="circ-245"/>
           <p:cNvSpPr/>
           <p:nvPr/>
         </p:nvSpPr>
@@ -6186,7 +6276,7 @@
       </p:sp>
       <p:pic>
         <p:nvPicPr>
-          <p:cNvPr id="21" name="icon-245" descr="icons/sync_b.png">    </p:cNvPr>
+          <p:cNvPr id="21" name="icon-246" descr="icons/sync_b.png">    </p:cNvPr>
           <p:cNvPicPr>
             <a:picLocks noChangeAspect="1"/>
           </p:cNvPicPr>
@@ -6210,7 +6300,7 @@
       </p:pic>
       <p:sp>
         <p:nvSpPr>
-          <p:cNvPr id="22" name="text-246"/>
+          <p:cNvPr id="22" name="text-247"/>
           <p:cNvSpPr txBox="1"/>
           <p:nvPr/>
         </p:nvSpPr>
@@ -6246,7 +6336,7 @@
       </p:sp>
       <p:sp>
         <p:nvSpPr>
-          <p:cNvPr id="23" name="text-247"/>
+          <p:cNvPr id="23" name="text-248"/>
           <p:cNvSpPr txBox="1"/>
           <p:nvPr/>
         </p:nvSpPr>
@@ -6431,7 +6521,7 @@
       </p:sp>
       <p:sp>
         <p:nvSpPr>
-          <p:cNvPr id="4" name="card-248"/>
+          <p:cNvPr id="4" name="card-249"/>
           <p:cNvSpPr/>
           <p:nvPr/>
         </p:nvSpPr>
@@ -6458,7 +6548,7 @@
       </p:sp>
       <p:sp>
         <p:nvSpPr>
-          <p:cNvPr id="5" name="text-249"/>
+          <p:cNvPr id="5" name="text-250"/>
           <p:cNvSpPr txBox="1"/>
           <p:nvPr/>
         </p:nvSpPr>
@@ -6494,7 +6584,7 @@
       </p:sp>
       <p:pic>
         <p:nvPicPr>
-          <p:cNvPr id="6" name="icon-250" descr="icons/check_b.png">    </p:cNvPr>
+          <p:cNvPr id="6" name="icon-251" descr="icons/check_b.png">    </p:cNvPr>
           <p:cNvPicPr>
             <a:picLocks noChangeAspect="1"/>
           </p:cNvPicPr>
@@ -6518,7 +6608,7 @@
       </p:pic>
       <p:sp>
         <p:nvSpPr>
-          <p:cNvPr id="7" name="text-251"/>
+          <p:cNvPr id="7" name="text-252"/>
           <p:cNvSpPr txBox="1"/>
           <p:nvPr/>
         </p:nvSpPr>
@@ -6554,7 +6644,7 @@
       </p:sp>
       <p:pic>
         <p:nvPicPr>
-          <p:cNvPr id="8" name="icon-252" descr="icons/check_b.png">    </p:cNvPr>
+          <p:cNvPr id="8" name="icon-253" descr="icons/check_b.png">    </p:cNvPr>
           <p:cNvPicPr>
             <a:picLocks noChangeAspect="1"/>
           </p:cNvPicPr>
@@ -6578,7 +6668,7 @@
       </p:pic>
       <p:sp>
         <p:nvSpPr>
-          <p:cNvPr id="9" name="text-253"/>
+          <p:cNvPr id="9" name="text-254"/>
           <p:cNvSpPr txBox="1"/>
           <p:nvPr/>
         </p:nvSpPr>
@@ -6614,7 +6704,7 @@
       </p:sp>
       <p:pic>
         <p:nvPicPr>
-          <p:cNvPr id="10" name="icon-254" descr="icons/check_b.png">    </p:cNvPr>
+          <p:cNvPr id="10" name="icon-255" descr="icons/check_b.png">    </p:cNvPr>
           <p:cNvPicPr>
             <a:picLocks noChangeAspect="1"/>
           </p:cNvPicPr>
@@ -6638,7 +6728,7 @@
       </p:pic>
       <p:sp>
         <p:nvSpPr>
-          <p:cNvPr id="11" name="text-255"/>
+          <p:cNvPr id="11" name="text-256"/>
           <p:cNvSpPr txBox="1"/>
           <p:nvPr/>
         </p:nvSpPr>
@@ -6674,7 +6764,7 @@
       </p:sp>
       <p:pic>
         <p:nvPicPr>
-          <p:cNvPr id="12" name="icon-256" descr="icons/check_b.png">    </p:cNvPr>
+          <p:cNvPr id="12" name="icon-257" descr="icons/check_b.png">    </p:cNvPr>
           <p:cNvPicPr>
             <a:picLocks noChangeAspect="1"/>
           </p:cNvPicPr>
@@ -6698,7 +6788,7 @@
       </p:pic>
       <p:sp>
         <p:nvSpPr>
-          <p:cNvPr id="13" name="text-257"/>
+          <p:cNvPr id="13" name="text-258"/>
           <p:cNvSpPr txBox="1"/>
           <p:nvPr/>
         </p:nvSpPr>
@@ -6734,7 +6824,7 @@
       </p:sp>
       <p:pic>
         <p:nvPicPr>
-          <p:cNvPr id="14" name="icon-258" descr="icons/check_b.png">    </p:cNvPr>
+          <p:cNvPr id="14" name="icon-259" descr="icons/check_b.png">    </p:cNvPr>
           <p:cNvPicPr>
             <a:picLocks noChangeAspect="1"/>
           </p:cNvPicPr>
@@ -6758,7 +6848,7 @@
       </p:pic>
       <p:sp>
         <p:nvSpPr>
-          <p:cNvPr id="15" name="text-259"/>
+          <p:cNvPr id="15" name="text-260"/>
           <p:cNvSpPr txBox="1"/>
           <p:nvPr/>
         </p:nvSpPr>
@@ -6794,7 +6884,7 @@
       </p:sp>
       <p:pic>
         <p:nvPicPr>
-          <p:cNvPr id="16" name="icon-260" descr="icons/check_b.png">    </p:cNvPr>
+          <p:cNvPr id="16" name="icon-261" descr="icons/check_b.png">    </p:cNvPr>
           <p:cNvPicPr>
             <a:picLocks noChangeAspect="1"/>
           </p:cNvPicPr>
@@ -6818,7 +6908,7 @@
       </p:pic>
       <p:sp>
         <p:nvSpPr>
-          <p:cNvPr id="17" name="text-261"/>
+          <p:cNvPr id="17" name="text-262"/>
           <p:cNvSpPr txBox="1"/>
           <p:nvPr/>
         </p:nvSpPr>
@@ -6854,7 +6944,7 @@
       </p:sp>
       <p:pic>
         <p:nvPicPr>
-          <p:cNvPr id="18" name="icon-262" descr="icons/check_b.png">    </p:cNvPr>
+          <p:cNvPr id="18" name="icon-263" descr="icons/check_b.png">    </p:cNvPr>
           <p:cNvPicPr>
             <a:picLocks noChangeAspect="1"/>
           </p:cNvPicPr>
@@ -6878,7 +6968,7 @@
       </p:pic>
       <p:sp>
         <p:nvSpPr>
-          <p:cNvPr id="19" name="text-263"/>
+          <p:cNvPr id="19" name="text-264"/>
           <p:cNvSpPr txBox="1"/>
           <p:nvPr/>
         </p:nvSpPr>
@@ -6914,7 +7004,7 @@
       </p:sp>
       <p:pic>
         <p:nvPicPr>
-          <p:cNvPr id="20" name="icon-264" descr="icons/check_b.png">    </p:cNvPr>
+          <p:cNvPr id="20" name="icon-265" descr="icons/check_b.png">    </p:cNvPr>
           <p:cNvPicPr>
             <a:picLocks noChangeAspect="1"/>
           </p:cNvPicPr>
@@ -6938,7 +7028,7 @@
       </p:pic>
       <p:sp>
         <p:nvSpPr>
-          <p:cNvPr id="21" name="text-265"/>
+          <p:cNvPr id="21" name="text-266"/>
           <p:cNvSpPr txBox="1"/>
           <p:nvPr/>
         </p:nvSpPr>
@@ -6974,7 +7064,7 @@
       </p:sp>
       <p:sp>
         <p:nvSpPr>
-          <p:cNvPr id="22" name="text-266"/>
+          <p:cNvPr id="22" name="text-267"/>
           <p:cNvSpPr txBox="1"/>
           <p:nvPr/>
         </p:nvSpPr>
@@ -7010,7 +7100,7 @@
       </p:sp>
       <p:sp>
         <p:nvSpPr>
-          <p:cNvPr id="23" name="card-267"/>
+          <p:cNvPr id="23" name="card-268"/>
           <p:cNvSpPr/>
           <p:nvPr/>
         </p:nvSpPr>
@@ -7037,7 +7127,7 @@
       </p:sp>
       <p:pic>
         <p:nvPicPr>
-          <p:cNvPr id="24" name="icon-268" descr="icons/doc_b.png">    </p:cNvPr>
+          <p:cNvPr id="24" name="icon-269" descr="icons/doc_b.png">    </p:cNvPr>
           <p:cNvPicPr>
             <a:picLocks noChangeAspect="1"/>
           </p:cNvPicPr>
@@ -7061,7 +7151,7 @@
       </p:pic>
       <p:sp>
         <p:nvSpPr>
-          <p:cNvPr id="25" name="text-269"/>
+          <p:cNvPr id="25" name="text-270"/>
           <p:cNvSpPr txBox="1"/>
           <p:nvPr/>
         </p:nvSpPr>
@@ -7111,7 +7201,7 @@
       </p:sp>
       <p:sp>
         <p:nvSpPr>
-          <p:cNvPr id="26" name="card-270"/>
+          <p:cNvPr id="26" name="card-271"/>
           <p:cNvSpPr/>
           <p:nvPr/>
         </p:nvSpPr>
@@ -7138,7 +7228,7 @@
       </p:sp>
       <p:pic>
         <p:nvPicPr>
-          <p:cNvPr id="27" name="icon-271" descr="icons/sync_w.png">    </p:cNvPr>
+          <p:cNvPr id="27" name="icon-272" descr="icons/sync_w.png">    </p:cNvPr>
           <p:cNvPicPr>
             <a:picLocks noChangeAspect="1"/>
           </p:cNvPicPr>
@@ -7162,7 +7252,7 @@
       </p:pic>
       <p:sp>
         <p:nvSpPr>
-          <p:cNvPr id="28" name="text-272"/>
+          <p:cNvPr id="28" name="text-273"/>
           <p:cNvSpPr txBox="1"/>
           <p:nvPr/>
         </p:nvSpPr>
@@ -7212,7 +7302,7 @@
       </p:sp>
       <p:sp>
         <p:nvSpPr>
-          <p:cNvPr id="29" name="text-273"/>
+          <p:cNvPr id="29" name="text-274"/>
           <p:cNvSpPr txBox="1"/>
           <p:nvPr/>
         </p:nvSpPr>
@@ -7248,7 +7338,7 @@
       </p:sp>
       <p:sp>
         <p:nvSpPr>
-          <p:cNvPr id="30" name="text-274"/>
+          <p:cNvPr id="30" name="text-275"/>
           <p:cNvSpPr txBox="1"/>
           <p:nvPr/>
         </p:nvSpPr>
@@ -7284,7 +7374,7 @@
       </p:sp>
       <p:sp>
         <p:nvSpPr>
-          <p:cNvPr id="31" name="card-275"/>
+          <p:cNvPr id="31" name="card-276"/>
           <p:cNvSpPr/>
           <p:nvPr/>
         </p:nvSpPr>
@@ -7318,7 +7408,7 @@
       </p:sp>
       <p:pic>
         <p:nvPicPr>
-          <p:cNvPr id="32" name="icon-276" descr="icons/book_b.png">    </p:cNvPr>
+          <p:cNvPr id="32" name="icon-277" descr="icons/book_b.png">    </p:cNvPr>
           <p:cNvPicPr>
             <a:picLocks noChangeAspect="1"/>
           </p:cNvPicPr>
@@ -7342,7 +7432,7 @@
       </p:pic>
       <p:sp>
         <p:nvSpPr>
-          <p:cNvPr id="33" name="text-277"/>
+          <p:cNvPr id="33" name="text-278"/>
           <p:cNvSpPr txBox="1"/>
           <p:nvPr/>
         </p:nvSpPr>
@@ -7378,7 +7468,7 @@
       </p:sp>
       <p:sp>
         <p:nvSpPr>
-          <p:cNvPr id="34" name="text-278"/>
+          <p:cNvPr id="34" name="text-279"/>
           <p:cNvSpPr txBox="1"/>
           <p:nvPr/>
         </p:nvSpPr>
@@ -7414,7 +7504,7 @@
       </p:sp>
       <p:sp>
         <p:nvSpPr>
-          <p:cNvPr id="35" name="card-279"/>
+          <p:cNvPr id="35" name="card-280"/>
           <p:cNvSpPr/>
           <p:nvPr/>
         </p:nvSpPr>
@@ -7448,7 +7538,7 @@
       </p:sp>
       <p:pic>
         <p:nvPicPr>
-          <p:cNvPr id="36" name="icon-280" descr="icons/doc_b.png">    </p:cNvPr>
+          <p:cNvPr id="36" name="icon-281" descr="icons/doc_b.png">    </p:cNvPr>
           <p:cNvPicPr>
             <a:picLocks noChangeAspect="1"/>
           </p:cNvPicPr>
@@ -7472,7 +7562,7 @@
       </p:pic>
       <p:sp>
         <p:nvSpPr>
-          <p:cNvPr id="37" name="text-281"/>
+          <p:cNvPr id="37" name="text-282"/>
           <p:cNvSpPr txBox="1"/>
           <p:nvPr/>
         </p:nvSpPr>
@@ -7508,7 +7598,7 @@
       </p:sp>
       <p:sp>
         <p:nvSpPr>
-          <p:cNvPr id="38" name="text-282"/>
+          <p:cNvPr id="38" name="text-283"/>
           <p:cNvSpPr txBox="1"/>
           <p:nvPr/>
         </p:nvSpPr>
@@ -7544,7 +7634,7 @@
       </p:sp>
       <p:sp>
         <p:nvSpPr>
-          <p:cNvPr id="39" name="card-283"/>
+          <p:cNvPr id="39" name="card-284"/>
           <p:cNvSpPr/>
           <p:nvPr/>
         </p:nvSpPr>
@@ -7578,7 +7668,7 @@
       </p:sp>
       <p:pic>
         <p:nvPicPr>
-          <p:cNvPr id="40" name="icon-284" descr="icons/search_b.png">    </p:cNvPr>
+          <p:cNvPr id="40" name="icon-285" descr="icons/search_b.png">    </p:cNvPr>
           <p:cNvPicPr>
             <a:picLocks noChangeAspect="1"/>
           </p:cNvPicPr>
@@ -7602,7 +7692,7 @@
       </p:pic>
       <p:sp>
         <p:nvSpPr>
-          <p:cNvPr id="41" name="text-285"/>
+          <p:cNvPr id="41" name="text-286"/>
           <p:cNvSpPr txBox="1"/>
           <p:nvPr/>
         </p:nvSpPr>
@@ -7638,7 +7728,7 @@
       </p:sp>
       <p:sp>
         <p:nvSpPr>
-          <p:cNvPr id="42" name="text-286"/>
+          <p:cNvPr id="42" name="text-287"/>
           <p:cNvSpPr txBox="1"/>
           <p:nvPr/>
         </p:nvSpPr>
@@ -7820,7 +7910,7 @@
       </p:sp>
       <p:sp>
         <p:nvSpPr>
-          <p:cNvPr id="4" name="card-287"/>
+          <p:cNvPr id="4" name="card-288"/>
           <p:cNvSpPr/>
           <p:nvPr/>
         </p:nvSpPr>
@@ -7847,7 +7937,7 @@
       </p:sp>
       <p:sp>
         <p:nvSpPr>
-          <p:cNvPr id="5" name="text-288"/>
+          <p:cNvPr id="5" name="text-289"/>
           <p:cNvSpPr txBox="1"/>
           <p:nvPr/>
         </p:nvSpPr>
@@ -7883,7 +7973,7 @@
       </p:sp>
       <p:sp>
         <p:nvSpPr>
-          <p:cNvPr id="6" name="big-289"/>
+          <p:cNvPr id="6" name="big-290"/>
           <p:cNvSpPr txBox="1"/>
           <p:nvPr/>
         </p:nvSpPr>
@@ -7930,7 +8020,7 @@
       </p:sp>
       <p:sp>
         <p:nvSpPr>
-          <p:cNvPr id="7" name="text-290"/>
+          <p:cNvPr id="7" name="text-291"/>
           <p:cNvSpPr txBox="1"/>
           <p:nvPr/>
         </p:nvSpPr>
@@ -7966,7 +8056,7 @@
       </p:sp>
       <p:sp>
         <p:nvSpPr>
-          <p:cNvPr id="8" name="text-291"/>
+          <p:cNvPr id="8" name="text-292"/>
           <p:cNvSpPr txBox="1"/>
           <p:nvPr/>
         </p:nvSpPr>
@@ -8002,7 +8092,7 @@
       </p:sp>
       <p:sp>
         <p:nvSpPr>
-          <p:cNvPr id="9" name="text-292"/>
+          <p:cNvPr id="9" name="text-293"/>
           <p:cNvSpPr txBox="1"/>
           <p:nvPr/>
         </p:nvSpPr>
@@ -8038,7 +8128,7 @@
       </p:sp>
       <p:sp>
         <p:nvSpPr>
-          <p:cNvPr id="10" name="text-293"/>
+          <p:cNvPr id="10" name="text-294"/>
           <p:cNvSpPr txBox="1"/>
           <p:nvPr/>
         </p:nvSpPr>
@@ -8074,7 +8164,7 @@
       </p:sp>
       <p:sp>
         <p:nvSpPr>
-          <p:cNvPr id="11" name="text-294"/>
+          <p:cNvPr id="11" name="text-295"/>
           <p:cNvSpPr txBox="1"/>
           <p:nvPr/>
         </p:nvSpPr>
@@ -8110,7 +8200,7 @@
       </p:sp>
       <p:sp>
         <p:nvSpPr>
-          <p:cNvPr id="12" name="text-295"/>
+          <p:cNvPr id="12" name="text-296"/>
           <p:cNvSpPr txBox="1"/>
           <p:nvPr/>
         </p:nvSpPr>
@@ -8146,7 +8236,7 @@
       </p:sp>
       <p:sp>
         <p:nvSpPr>
-          <p:cNvPr id="13" name="text-296"/>
+          <p:cNvPr id="13" name="text-297"/>
           <p:cNvSpPr txBox="1"/>
           <p:nvPr/>
         </p:nvSpPr>
@@ -8182,7 +8272,7 @@
       </p:sp>
       <p:sp>
         <p:nvSpPr>
-          <p:cNvPr id="14" name="circ-297"/>
+          <p:cNvPr id="14" name="circ-298"/>
           <p:cNvSpPr/>
           <p:nvPr/>
         </p:nvSpPr>
@@ -8207,7 +8297,7 @@
       </p:sp>
       <p:pic>
         <p:nvPicPr>
-          <p:cNvPr id="15" name="icon-298" descr="icons/users_b.png">    </p:cNvPr>
+          <p:cNvPr id="15" name="icon-299" descr="icons/users_b.png">    </p:cNvPr>
           <p:cNvPicPr>
             <a:picLocks noChangeAspect="1"/>
           </p:cNvPicPr>
@@ -8231,7 +8321,7 @@
       </p:pic>
       <p:sp>
         <p:nvSpPr>
-          <p:cNvPr id="16" name="text-299"/>
+          <p:cNvPr id="16" name="text-300"/>
           <p:cNvSpPr txBox="1"/>
           <p:nvPr/>
         </p:nvSpPr>
@@ -8267,7 +8357,7 @@
       </p:sp>
       <p:sp>
         <p:nvSpPr>
-          <p:cNvPr id="17" name="text-300"/>
+          <p:cNvPr id="17" name="text-301"/>
           <p:cNvSpPr txBox="1"/>
           <p:nvPr/>
         </p:nvSpPr>
@@ -8303,7 +8393,7 @@
       </p:sp>
       <p:sp>
         <p:nvSpPr>
-          <p:cNvPr id="18" name="circ-301"/>
+          <p:cNvPr id="18" name="circ-302"/>
           <p:cNvSpPr/>
           <p:nvPr/>
         </p:nvSpPr>
@@ -8328,7 +8418,7 @@
       </p:sp>
       <p:pic>
         <p:nvPicPr>
-          <p:cNvPr id="19" name="icon-302" descr="icons/heart_b.png">    </p:cNvPr>
+          <p:cNvPr id="19" name="icon-303" descr="icons/heart_b.png">    </p:cNvPr>
           <p:cNvPicPr>
             <a:picLocks noChangeAspect="1"/>
           </p:cNvPicPr>
@@ -8352,7 +8442,7 @@
       </p:pic>
       <p:sp>
         <p:nvSpPr>
-          <p:cNvPr id="20" name="text-303"/>
+          <p:cNvPr id="20" name="text-304"/>
           <p:cNvSpPr txBox="1"/>
           <p:nvPr/>
         </p:nvSpPr>
@@ -8388,7 +8478,7 @@
       </p:sp>
       <p:sp>
         <p:nvSpPr>
-          <p:cNvPr id="21" name="text-304"/>
+          <p:cNvPr id="21" name="text-305"/>
           <p:cNvSpPr txBox="1"/>
           <p:nvPr/>
         </p:nvSpPr>
@@ -8424,7 +8514,7 @@
       </p:sp>
       <p:sp>
         <p:nvSpPr>
-          <p:cNvPr id="22" name="circ-305"/>
+          <p:cNvPr id="22" name="circ-306"/>
           <p:cNvSpPr/>
           <p:nvPr/>
         </p:nvSpPr>
@@ -8449,7 +8539,7 @@
       </p:sp>
       <p:pic>
         <p:nvPicPr>
-          <p:cNvPr id="23" name="icon-306" descr="icons/bolt_b.png">    </p:cNvPr>
+          <p:cNvPr id="23" name="icon-307" descr="icons/bolt_b.png">    </p:cNvPr>
           <p:cNvPicPr>
             <a:picLocks noChangeAspect="1"/>
           </p:cNvPicPr>
@@ -8473,7 +8563,7 @@
       </p:pic>
       <p:sp>
         <p:nvSpPr>
-          <p:cNvPr id="24" name="text-307"/>
+          <p:cNvPr id="24" name="text-308"/>
           <p:cNvSpPr txBox="1"/>
           <p:nvPr/>
         </p:nvSpPr>
@@ -8509,7 +8599,7 @@
       </p:sp>
       <p:sp>
         <p:nvSpPr>
-          <p:cNvPr id="25" name="text-308"/>
+          <p:cNvPr id="25" name="text-309"/>
           <p:cNvSpPr txBox="1"/>
           <p:nvPr/>
         </p:nvSpPr>
@@ -8545,7 +8635,7 @@
       </p:sp>
       <p:sp>
         <p:nvSpPr>
-          <p:cNvPr id="26" name="circ-309"/>
+          <p:cNvPr id="26" name="circ-310"/>
           <p:cNvSpPr/>
           <p:nvPr/>
         </p:nvSpPr>
@@ -8570,7 +8660,7 @@
       </p:sp>
       <p:pic>
         <p:nvPicPr>
-          <p:cNvPr id="27" name="icon-310" descr="icons/chart_b.png">    </p:cNvPr>
+          <p:cNvPr id="27" name="icon-311" descr="icons/chart_b.png">    </p:cNvPr>
           <p:cNvPicPr>
             <a:picLocks noChangeAspect="1"/>
           </p:cNvPicPr>
@@ -8594,7 +8684,7 @@
       </p:pic>
       <p:sp>
         <p:nvSpPr>
-          <p:cNvPr id="28" name="text-311"/>
+          <p:cNvPr id="28" name="text-312"/>
           <p:cNvSpPr txBox="1"/>
           <p:nvPr/>
         </p:nvSpPr>
@@ -8630,7 +8720,7 @@
       </p:sp>
       <p:sp>
         <p:nvSpPr>
-          <p:cNvPr id="29" name="text-312"/>
+          <p:cNvPr id="29" name="text-313"/>
           <p:cNvSpPr txBox="1"/>
           <p:nvPr/>
         </p:nvSpPr>
@@ -8766,7 +8856,7 @@
                   <a:srgbClr val="191F28"/>
                 </a:solidFill>
               </a:rPr>
-              <a:t>다음 단계</a:t>
+              <a:t>제언 : MeAI 리포트 생성과 잇는다</a:t>
             </a:r>
             <a:endParaRPr lang="en-US" sz="2800" dirty="0"/>
           </a:p>
@@ -8804,7 +8894,7 @@
                   <a:srgbClr val="4E5968"/>
                 </a:solidFill>
               </a:rPr>
-              <a:t>프로토타입은 완성돼 있습니다 — 이제 현장에서 써 보고 내용을 키울 차례</a:t>
+              <a:t>이 생성기는 MeAI 고도화를 위한 선행 과제로 만들었습니다 — 여기서 만든 데이터와 조립 틀을 MeAI 리포트의 재료로 씁니다</a:t>
             </a:r>
             <a:endParaRPr lang="en-US" sz="1400" dirty="0"/>
           </a:p>
@@ -8812,18 +8902,18 @@
       </p:sp>
       <p:sp>
         <p:nvSpPr>
-          <p:cNvPr id="4" name="card-313"/>
+          <p:cNvPr id="4" name="card-314"/>
           <p:cNvSpPr/>
           <p:nvPr/>
         </p:nvSpPr>
         <p:spPr>
           <a:xfrm>
-            <a:off x="548640" y="1783080"/>
-            <a:ext cx="5440680" cy="1508760"/>
+            <a:off x="548640" y="1737360"/>
+            <a:ext cx="5212080" cy="4069080"/>
           </a:xfrm>
           <a:prstGeom prst="roundRect">
             <a:avLst>
-              <a:gd name="adj" fmla="val 9697"/>
+              <a:gd name="adj" fmla="val 3596"/>
             </a:avLst>
           </a:prstGeom>
           <a:solidFill>
@@ -8839,14 +8929,14 @@
       </p:sp>
       <p:sp>
         <p:nvSpPr>
-          <p:cNvPr id="5" name="text-314"/>
-          <p:cNvSpPr txBox="1"/>
-          <p:nvPr/>
-        </p:nvSpPr>
-        <p:spPr>
-          <a:xfrm>
-            <a:off x="822960" y="1984248"/>
-            <a:ext cx="4937760" cy="365760"/>
+          <p:cNvPr id="5" name="text-315"/>
+          <p:cNvSpPr txBox="1"/>
+          <p:nvPr/>
+        </p:nvSpPr>
+        <p:spPr>
+          <a:xfrm>
+            <a:off x="822960" y="1920240"/>
+            <a:ext cx="4663440" cy="365760"/>
           </a:xfrm>
           <a:prstGeom prst="rect">
             <a:avLst/>
@@ -8864,10 +8954,10 @@
             <a:r>
               <a:rPr lang="en-US" sz="1500" b="1" dirty="0">
                 <a:solidFill>
-                  <a:srgbClr val="3182F6"/>
-                </a:solidFill>
-              </a:rPr>
-              <a:t>① 시범 운영</a:t>
+                  <a:srgbClr val="191F28"/>
+                </a:solidFill>
+              </a:rPr>
+              <a:t>MeAI 가 설계 리포트를 쓸 때 막히는 곳</a:t>
             </a:r>
             <a:endParaRPr lang="en-US" sz="1500" dirty="0"/>
           </a:p>
@@ -8875,14 +8965,77 @@
       </p:sp>
       <p:sp>
         <p:nvSpPr>
-          <p:cNvPr id="6" name="text-315"/>
-          <p:cNvSpPr txBox="1"/>
-          <p:nvPr/>
-        </p:nvSpPr>
-        <p:spPr>
-          <a:xfrm>
-            <a:off x="822960" y="2377440"/>
-            <a:ext cx="4937760" cy="868680"/>
+          <p:cNvPr id="6" name="badge-316"/>
+          <p:cNvSpPr/>
+          <p:nvPr/>
+        </p:nvSpPr>
+        <p:spPr>
+          <a:xfrm>
+            <a:off x="822960" y="2395728"/>
+            <a:ext cx="822960" cy="310896"/>
+          </a:xfrm>
+          <a:prstGeom prst="roundRect">
+            <a:avLst>
+              <a:gd name="adj" fmla="val 50000"/>
+            </a:avLst>
+          </a:prstGeom>
+          <a:solidFill>
+            <a:srgbClr val="FFECEC"/>
+          </a:solidFill>
+          <a:ln w="12700">
+            <a:solidFill>
+              <a:srgbClr val="FFECEC"/>
+            </a:solidFill>
+            <a:prstDash val="solid"/>
+          </a:ln>
+        </p:spPr>
+      </p:sp>
+      <p:sp>
+        <p:nvSpPr>
+          <p:cNvPr id="7" name="text-317"/>
+          <p:cNvSpPr txBox="1"/>
+          <p:nvPr/>
+        </p:nvSpPr>
+        <p:spPr>
+          <a:xfrm>
+            <a:off x="822960" y="2395728"/>
+            <a:ext cx="822960" cy="310896"/>
+          </a:xfrm>
+          <a:prstGeom prst="rect">
+            <a:avLst/>
+          </a:prstGeom>
+          <a:noFill/>
+          <a:ln/>
+        </p:spPr>
+        <p:txBody>
+          <a:bodyPr wrap="square" lIns="0" tIns="0" rIns="0" bIns="0" rtlCol="0" anchor="ctr"/>
+          <a:lstStyle/>
+          <a:p>
+            <a:pPr algn="ctr" indent="0" marL="0">
+              <a:buNone/>
+            </a:pPr>
+            <a:r>
+              <a:rPr lang="en-US" sz="1100" b="1" dirty="0">
+                <a:solidFill>
+                  <a:srgbClr val="F04452"/>
+                </a:solidFill>
+              </a:rPr>
+              <a:t>근거</a:t>
+            </a:r>
+            <a:endParaRPr lang="en-US" sz="1100" dirty="0"/>
+          </a:p>
+        </p:txBody>
+      </p:sp>
+      <p:sp>
+        <p:nvSpPr>
+          <p:cNvPr id="8" name="text-318"/>
+          <p:cNvSpPr txBox="1"/>
+          <p:nvPr/>
+        </p:nvSpPr>
+        <p:spPr>
+          <a:xfrm>
+            <a:off x="1783080" y="2377440"/>
+            <a:ext cx="3657600" cy="777240"/>
           </a:xfrm>
           <a:prstGeom prst="rect">
             <a:avLst/>
@@ -8898,26 +9051,989 @@
               <a:buNone/>
             </a:pPr>
             <a:r>
-              <a:rPr lang="en-US" sz="1200" dirty="0">
+              <a:rPr lang="en-US" sz="1150" dirty="0">
                 <a:solidFill>
                   <a:srgbClr val="4E5968"/>
                 </a:solidFill>
               </a:rPr>
-              <a:t>세일즈혁신TF 인접 조직 설계사 30명 · 4주. 생성 시간 · 매칭률 · 상담 활용도를 실측해 가정값을 대체합니다.</a:t>
-            </a:r>
-            <a:endParaRPr lang="en-US" sz="1200" dirty="0"/>
-          </a:p>
-        </p:txBody>
-      </p:sp>
-      <p:sp>
-        <p:nvSpPr>
-          <p:cNvPr id="7" name="card-316"/>
+              <a:t>어떤 담보가 어느 질병코드를 보장하는지 — 약관 별표를 모르면 그럴듯한 추정이 섞인다</a:t>
+            </a:r>
+            <a:endParaRPr lang="en-US" sz="1150" dirty="0"/>
+          </a:p>
+        </p:txBody>
+      </p:sp>
+      <p:sp>
+        <p:nvSpPr>
+          <p:cNvPr id="9" name="badge-319"/>
           <p:cNvSpPr/>
           <p:nvPr/>
         </p:nvSpPr>
         <p:spPr>
           <a:xfrm>
+            <a:off x="822960" y="3236976"/>
+            <a:ext cx="822960" cy="310896"/>
+          </a:xfrm>
+          <a:prstGeom prst="roundRect">
+            <a:avLst>
+              <a:gd name="adj" fmla="val 50000"/>
+            </a:avLst>
+          </a:prstGeom>
+          <a:solidFill>
+            <a:srgbClr val="FFECEC"/>
+          </a:solidFill>
+          <a:ln w="12700">
+            <a:solidFill>
+              <a:srgbClr val="FFECEC"/>
+            </a:solidFill>
+            <a:prstDash val="solid"/>
+          </a:ln>
+        </p:spPr>
+      </p:sp>
+      <p:sp>
+        <p:nvSpPr>
+          <p:cNvPr id="10" name="text-320"/>
+          <p:cNvSpPr txBox="1"/>
+          <p:nvPr/>
+        </p:nvSpPr>
+        <p:spPr>
+          <a:xfrm>
+            <a:off x="822960" y="3236976"/>
+            <a:ext cx="822960" cy="310896"/>
+          </a:xfrm>
+          <a:prstGeom prst="rect">
+            <a:avLst/>
+          </a:prstGeom>
+          <a:noFill/>
+          <a:ln/>
+        </p:spPr>
+        <p:txBody>
+          <a:bodyPr wrap="square" lIns="0" tIns="0" rIns="0" bIns="0" rtlCol="0" anchor="ctr"/>
+          <a:lstStyle/>
+          <a:p>
+            <a:pPr algn="ctr" indent="0" marL="0">
+              <a:buNone/>
+            </a:pPr>
+            <a:r>
+              <a:rPr lang="en-US" sz="1100" b="1" dirty="0">
+                <a:solidFill>
+                  <a:srgbClr val="F04452"/>
+                </a:solidFill>
+              </a:rPr>
+              <a:t>입력</a:t>
+            </a:r>
+            <a:endParaRPr lang="en-US" sz="1100" dirty="0"/>
+          </a:p>
+        </p:txBody>
+      </p:sp>
+      <p:sp>
+        <p:nvSpPr>
+          <p:cNvPr id="11" name="text-321"/>
+          <p:cNvSpPr txBox="1"/>
+          <p:nvPr/>
+        </p:nvSpPr>
+        <p:spPr>
+          <a:xfrm>
+            <a:off x="1783080" y="3218688"/>
+            <a:ext cx="3657600" cy="777240"/>
+          </a:xfrm>
+          <a:prstGeom prst="rect">
+            <a:avLst/>
+          </a:prstGeom>
+          <a:noFill/>
+          <a:ln/>
+        </p:spPr>
+        <p:txBody>
+          <a:bodyPr wrap="square" lIns="0" tIns="0" rIns="0" bIns="0" rtlCol="0" anchor="t"/>
+          <a:lstStyle/>
+          <a:p>
+            <a:pPr indent="0" marL="0">
+              <a:buNone/>
+            </a:pPr>
+            <a:r>
+              <a:rPr lang="en-US" sz="1150" dirty="0">
+                <a:solidFill>
+                  <a:srgbClr val="4E5968"/>
+                </a:solidFill>
+              </a:rPr>
+              <a:t>설계서 PDF 를 그대로 주면 담보명 · 금액 · 설명문이 섞여 들어가 구조를 잃는다</a:t>
+            </a:r>
+            <a:endParaRPr lang="en-US" sz="1150" dirty="0"/>
+          </a:p>
+        </p:txBody>
+      </p:sp>
+      <p:sp>
+        <p:nvSpPr>
+          <p:cNvPr id="12" name="badge-322"/>
+          <p:cNvSpPr/>
+          <p:nvPr/>
+        </p:nvSpPr>
+        <p:spPr>
+          <a:xfrm>
+            <a:off x="822960" y="4078224"/>
+            <a:ext cx="822960" cy="310896"/>
+          </a:xfrm>
+          <a:prstGeom prst="roundRect">
+            <a:avLst>
+              <a:gd name="adj" fmla="val 50000"/>
+            </a:avLst>
+          </a:prstGeom>
+          <a:solidFill>
+            <a:srgbClr val="FFECEC"/>
+          </a:solidFill>
+          <a:ln w="12700">
+            <a:solidFill>
+              <a:srgbClr val="FFECEC"/>
+            </a:solidFill>
+            <a:prstDash val="solid"/>
+          </a:ln>
+        </p:spPr>
+      </p:sp>
+      <p:sp>
+        <p:nvSpPr>
+          <p:cNvPr id="13" name="text-323"/>
+          <p:cNvSpPr txBox="1"/>
+          <p:nvPr/>
+        </p:nvSpPr>
+        <p:spPr>
+          <a:xfrm>
+            <a:off x="822960" y="4078224"/>
+            <a:ext cx="822960" cy="310896"/>
+          </a:xfrm>
+          <a:prstGeom prst="rect">
+            <a:avLst/>
+          </a:prstGeom>
+          <a:noFill/>
+          <a:ln/>
+        </p:spPr>
+        <p:txBody>
+          <a:bodyPr wrap="square" lIns="0" tIns="0" rIns="0" bIns="0" rtlCol="0" anchor="ctr"/>
+          <a:lstStyle/>
+          <a:p>
+            <a:pPr algn="ctr" indent="0" marL="0">
+              <a:buNone/>
+            </a:pPr>
+            <a:r>
+              <a:rPr lang="en-US" sz="1100" b="1" dirty="0">
+                <a:solidFill>
+                  <a:srgbClr val="F04452"/>
+                </a:solidFill>
+              </a:rPr>
+              <a:t>출력</a:t>
+            </a:r>
+            <a:endParaRPr lang="en-US" sz="1100" dirty="0"/>
+          </a:p>
+        </p:txBody>
+      </p:sp>
+      <p:sp>
+        <p:nvSpPr>
+          <p:cNvPr id="14" name="text-324"/>
+          <p:cNvSpPr txBox="1"/>
+          <p:nvPr/>
+        </p:nvSpPr>
+        <p:spPr>
+          <a:xfrm>
+            <a:off x="1783080" y="4059936"/>
+            <a:ext cx="3657600" cy="777240"/>
+          </a:xfrm>
+          <a:prstGeom prst="rect">
+            <a:avLst/>
+          </a:prstGeom>
+          <a:noFill/>
+          <a:ln/>
+        </p:spPr>
+        <p:txBody>
+          <a:bodyPr wrap="square" lIns="0" tIns="0" rIns="0" bIns="0" rtlCol="0" anchor="t"/>
+          <a:lstStyle/>
+          <a:p>
+            <a:pPr indent="0" marL="0">
+              <a:buNone/>
+            </a:pPr>
+            <a:r>
+              <a:rPr lang="en-US" sz="1150" dirty="0">
+                <a:solidFill>
+                  <a:srgbClr val="4E5968"/>
+                </a:solidFill>
+              </a:rPr>
+              <a:t>답은 글인데 설계사가 원하는 것은 고객 앞에 놓을 「지면」이다</a:t>
+            </a:r>
+            <a:endParaRPr lang="en-US" sz="1150" dirty="0"/>
+          </a:p>
+        </p:txBody>
+      </p:sp>
+      <p:sp>
+        <p:nvSpPr>
+          <p:cNvPr id="15" name="badge-325"/>
+          <p:cNvSpPr/>
+          <p:nvPr/>
+        </p:nvSpPr>
+        <p:spPr>
+          <a:xfrm>
+            <a:off x="822960" y="4919472"/>
+            <a:ext cx="822960" cy="310896"/>
+          </a:xfrm>
+          <a:prstGeom prst="roundRect">
+            <a:avLst>
+              <a:gd name="adj" fmla="val 50000"/>
+            </a:avLst>
+          </a:prstGeom>
+          <a:solidFill>
+            <a:srgbClr val="FFECEC"/>
+          </a:solidFill>
+          <a:ln w="12700">
+            <a:solidFill>
+              <a:srgbClr val="FFECEC"/>
+            </a:solidFill>
+            <a:prstDash val="solid"/>
+          </a:ln>
+        </p:spPr>
+      </p:sp>
+      <p:sp>
+        <p:nvSpPr>
+          <p:cNvPr id="16" name="text-326"/>
+          <p:cNvSpPr txBox="1"/>
+          <p:nvPr/>
+        </p:nvSpPr>
+        <p:spPr>
+          <a:xfrm>
+            <a:off x="822960" y="4919472"/>
+            <a:ext cx="822960" cy="310896"/>
+          </a:xfrm>
+          <a:prstGeom prst="rect">
+            <a:avLst/>
+          </a:prstGeom>
+          <a:noFill/>
+          <a:ln/>
+        </p:spPr>
+        <p:txBody>
+          <a:bodyPr wrap="square" lIns="0" tIns="0" rIns="0" bIns="0" rtlCol="0" anchor="ctr"/>
+          <a:lstStyle/>
+          <a:p>
+            <a:pPr algn="ctr" indent="0" marL="0">
+              <a:buNone/>
+            </a:pPr>
+            <a:r>
+              <a:rPr lang="en-US" sz="1100" b="1" dirty="0">
+                <a:solidFill>
+                  <a:srgbClr val="F04452"/>
+                </a:solidFill>
+              </a:rPr>
+              <a:t>검증</a:t>
+            </a:r>
+            <a:endParaRPr lang="en-US" sz="1100" dirty="0"/>
+          </a:p>
+        </p:txBody>
+      </p:sp>
+      <p:sp>
+        <p:nvSpPr>
+          <p:cNvPr id="17" name="text-327"/>
+          <p:cNvSpPr txBox="1"/>
+          <p:nvPr/>
+        </p:nvSpPr>
+        <p:spPr>
+          <a:xfrm>
+            <a:off x="1783080" y="4901184"/>
+            <a:ext cx="3657600" cy="777240"/>
+          </a:xfrm>
+          <a:prstGeom prst="rect">
+            <a:avLst/>
+          </a:prstGeom>
+          <a:noFill/>
+          <a:ln/>
+        </p:spPr>
+        <p:txBody>
+          <a:bodyPr wrap="square" lIns="0" tIns="0" rIns="0" bIns="0" rtlCol="0" anchor="t"/>
+          <a:lstStyle/>
+          <a:p>
+            <a:pPr indent="0" marL="0">
+              <a:buNone/>
+            </a:pPr>
+            <a:r>
+              <a:rPr lang="en-US" sz="1150" dirty="0">
+                <a:solidFill>
+                  <a:srgbClr val="4E5968"/>
+                </a:solidFill>
+              </a:rPr>
+              <a:t>생성된 글이 약관과 맞는지 확인할 장치가 없다</a:t>
+            </a:r>
+            <a:endParaRPr lang="en-US" sz="1150" dirty="0"/>
+          </a:p>
+        </p:txBody>
+      </p:sp>
+      <p:sp>
+        <p:nvSpPr>
+          <p:cNvPr id="18" name="circ-328"/>
+          <p:cNvSpPr/>
+          <p:nvPr/>
+        </p:nvSpPr>
+        <p:spPr>
+          <a:xfrm>
+            <a:off x="6016752" y="1627632"/>
+            <a:ext cx="621792" cy="621792"/>
+          </a:xfrm>
+          <a:prstGeom prst="ellipse">
+            <a:avLst/>
+          </a:prstGeom>
+          <a:solidFill>
+            <a:srgbClr val="E8F3FF"/>
+          </a:solidFill>
+          <a:ln w="12700">
+            <a:solidFill>
+              <a:srgbClr val="E8F3FF"/>
+            </a:solidFill>
+            <a:prstDash val="solid"/>
+          </a:ln>
+        </p:spPr>
+      </p:sp>
+      <p:pic>
+        <p:nvPicPr>
+          <p:cNvPr id="19" name="icon-329" descr="icons/layers_b.png">    </p:cNvPr>
+          <p:cNvPicPr>
+            <a:picLocks noChangeAspect="1"/>
+          </p:cNvPicPr>
+          <p:nvPr/>
+        </p:nvPicPr>
+        <p:blipFill>
+          <a:blip r:embed="rId1"/>
+          <a:stretch>
+            <a:fillRect/>
+          </a:stretch>
+        </p:blipFill>
+        <p:spPr>
+          <a:xfrm>
             <a:off x="6172200" y="1783080"/>
+            <a:ext cx="310896" cy="310896"/>
+          </a:xfrm>
+          <a:prstGeom prst="rect">
+            <a:avLst/>
+          </a:prstGeom>
+        </p:spPr>
+      </p:pic>
+      <p:sp>
+        <p:nvSpPr>
+          <p:cNvPr id="20" name="text-330"/>
+          <p:cNvSpPr txBox="1"/>
+          <p:nvPr/>
+        </p:nvSpPr>
+        <p:spPr>
+          <a:xfrm>
+            <a:off x="6766560" y="1737360"/>
+            <a:ext cx="4846320" cy="347472"/>
+          </a:xfrm>
+          <a:prstGeom prst="rect">
+            <a:avLst/>
+          </a:prstGeom>
+          <a:noFill/>
+          <a:ln/>
+        </p:spPr>
+        <p:txBody>
+          <a:bodyPr wrap="square" lIns="0" tIns="0" rIns="0" bIns="0" rtlCol="0" anchor="t"/>
+          <a:lstStyle/>
+          <a:p>
+            <a:pPr indent="0" marL="0">
+              <a:buNone/>
+            </a:pPr>
+            <a:r>
+              <a:rPr lang="en-US" sz="1400" b="1" dirty="0">
+                <a:solidFill>
+                  <a:srgbClr val="191F28"/>
+                </a:solidFill>
+              </a:rPr>
+              <a:t>특약 마스터 4,338건</a:t>
+            </a:r>
+            <a:endParaRPr lang="en-US" sz="1400" dirty="0"/>
+          </a:p>
+        </p:txBody>
+      </p:sp>
+      <p:sp>
+        <p:nvSpPr>
+          <p:cNvPr id="21" name="text-331"/>
+          <p:cNvSpPr txBox="1"/>
+          <p:nvPr/>
+        </p:nvSpPr>
+        <p:spPr>
+          <a:xfrm>
+            <a:off x="6766560" y="2103120"/>
+            <a:ext cx="4846320" cy="731520"/>
+          </a:xfrm>
+          <a:prstGeom prst="rect">
+            <a:avLst/>
+          </a:prstGeom>
+          <a:noFill/>
+          <a:ln/>
+        </p:spPr>
+        <p:txBody>
+          <a:bodyPr wrap="square" lIns="0" tIns="0" rIns="0" bIns="0" rtlCol="0" anchor="t"/>
+          <a:lstStyle/>
+          <a:p>
+            <a:pPr indent="0" marL="0">
+              <a:buNone/>
+            </a:pPr>
+            <a:r>
+              <a:rPr lang="en-US" sz="1150" dirty="0">
+                <a:solidFill>
+                  <a:srgbClr val="4E5968"/>
+                </a:solidFill>
+              </a:rPr>
+              <a:t>질병코드 · 제외코드 · 수가코드가 붙은 약관 데이터와 Key Point · 용어 창고를 MeAI 지식 자료로 연결 → 리포트 문장에 「약관 별표 ○○」 근거가 붙는다</a:t>
+            </a:r>
+            <a:endParaRPr lang="en-US" sz="1150" dirty="0"/>
+          </a:p>
+        </p:txBody>
+      </p:sp>
+      <p:sp>
+        <p:nvSpPr>
+          <p:cNvPr id="22" name="circ-332"/>
+          <p:cNvSpPr/>
+          <p:nvPr/>
+        </p:nvSpPr>
+        <p:spPr>
+          <a:xfrm>
+            <a:off x="6016752" y="2770632"/>
+            <a:ext cx="621792" cy="621792"/>
+          </a:xfrm>
+          <a:prstGeom prst="ellipse">
+            <a:avLst/>
+          </a:prstGeom>
+          <a:solidFill>
+            <a:srgbClr val="E8F3FF"/>
+          </a:solidFill>
+          <a:ln w="12700">
+            <a:solidFill>
+              <a:srgbClr val="E8F3FF"/>
+            </a:solidFill>
+            <a:prstDash val="solid"/>
+          </a:ln>
+        </p:spPr>
+      </p:sp>
+      <p:pic>
+        <p:nvPicPr>
+          <p:cNvPr id="23" name="icon-333" descr="icons/upload_b.png">    </p:cNvPr>
+          <p:cNvPicPr>
+            <a:picLocks noChangeAspect="1"/>
+          </p:cNvPicPr>
+          <p:nvPr/>
+        </p:nvPicPr>
+        <p:blipFill>
+          <a:blip r:embed="rId2"/>
+          <a:stretch>
+            <a:fillRect/>
+          </a:stretch>
+        </p:blipFill>
+        <p:spPr>
+          <a:xfrm>
+            <a:off x="6172200" y="2926080"/>
+            <a:ext cx="310896" cy="310896"/>
+          </a:xfrm>
+          <a:prstGeom prst="rect">
+            <a:avLst/>
+          </a:prstGeom>
+        </p:spPr>
+      </p:pic>
+      <p:sp>
+        <p:nvSpPr>
+          <p:cNvPr id="24" name="text-334"/>
+          <p:cNvSpPr txBox="1"/>
+          <p:nvPr/>
+        </p:nvSpPr>
+        <p:spPr>
+          <a:xfrm>
+            <a:off x="6766560" y="2880360"/>
+            <a:ext cx="4846320" cy="347472"/>
+          </a:xfrm>
+          <a:prstGeom prst="rect">
+            <a:avLst/>
+          </a:prstGeom>
+          <a:noFill/>
+          <a:ln/>
+        </p:spPr>
+        <p:txBody>
+          <a:bodyPr wrap="square" lIns="0" tIns="0" rIns="0" bIns="0" rtlCol="0" anchor="t"/>
+          <a:lstStyle/>
+          <a:p>
+            <a:pPr indent="0" marL="0">
+              <a:buNone/>
+            </a:pPr>
+            <a:r>
+              <a:rPr lang="en-US" sz="1400" b="1" dirty="0">
+                <a:solidFill>
+                  <a:srgbClr val="191F28"/>
+                </a:solidFill>
+              </a:rPr>
+              <a:t>설계서 읽기 · 갈래 분류</a:t>
+            </a:r>
+            <a:endParaRPr lang="en-US" sz="1400" dirty="0"/>
+          </a:p>
+        </p:txBody>
+      </p:sp>
+      <p:sp>
+        <p:nvSpPr>
+          <p:cNvPr id="25" name="text-335"/>
+          <p:cNvSpPr txBox="1"/>
+          <p:nvPr/>
+        </p:nvSpPr>
+        <p:spPr>
+          <a:xfrm>
+            <a:off x="6766560" y="3246120"/>
+            <a:ext cx="4846320" cy="731520"/>
+          </a:xfrm>
+          <a:prstGeom prst="rect">
+            <a:avLst/>
+          </a:prstGeom>
+          <a:noFill/>
+          <a:ln/>
+        </p:spPr>
+        <p:txBody>
+          <a:bodyPr wrap="square" lIns="0" tIns="0" rIns="0" bIns="0" rtlCol="0" anchor="t"/>
+          <a:lstStyle/>
+          <a:p>
+            <a:pPr indent="0" marL="0">
+              <a:buNone/>
+            </a:pPr>
+            <a:r>
+              <a:rPr lang="en-US" sz="1150" dirty="0">
+                <a:solidFill>
+                  <a:srgbClr val="4E5968"/>
+                </a:solidFill>
+              </a:rPr>
+              <a:t>설계서 PDF → 담보 · 금액 · 설명문 · 면책감액 조건이 정리된 구조 데이터. MeAI 는 이것을 입력으로 받아 고객 맞춤 서술만 맡는다</a:t>
+            </a:r>
+            <a:endParaRPr lang="en-US" sz="1150" dirty="0"/>
+          </a:p>
+        </p:txBody>
+      </p:sp>
+      <p:sp>
+        <p:nvSpPr>
+          <p:cNvPr id="26" name="circ-336"/>
+          <p:cNvSpPr/>
+          <p:nvPr/>
+        </p:nvSpPr>
+        <p:spPr>
+          <a:xfrm>
+            <a:off x="6016752" y="3913632"/>
+            <a:ext cx="621792" cy="621792"/>
+          </a:xfrm>
+          <a:prstGeom prst="ellipse">
+            <a:avLst/>
+          </a:prstGeom>
+          <a:solidFill>
+            <a:srgbClr val="E8F3FF"/>
+          </a:solidFill>
+          <a:ln w="12700">
+            <a:solidFill>
+              <a:srgbClr val="E8F3FF"/>
+            </a:solidFill>
+            <a:prstDash val="solid"/>
+          </a:ln>
+        </p:spPr>
+      </p:sp>
+      <p:pic>
+        <p:nvPicPr>
+          <p:cNvPr id="27" name="icon-337" descr="icons/book_b.png">    </p:cNvPr>
+          <p:cNvPicPr>
+            <a:picLocks noChangeAspect="1"/>
+          </p:cNvPicPr>
+          <p:nvPr/>
+        </p:nvPicPr>
+        <p:blipFill>
+          <a:blip r:embed="rId3"/>
+          <a:stretch>
+            <a:fillRect/>
+          </a:stretch>
+        </p:blipFill>
+        <p:spPr>
+          <a:xfrm>
+            <a:off x="6172200" y="4069080"/>
+            <a:ext cx="310896" cy="310896"/>
+          </a:xfrm>
+          <a:prstGeom prst="rect">
+            <a:avLst/>
+          </a:prstGeom>
+        </p:spPr>
+      </p:pic>
+      <p:sp>
+        <p:nvSpPr>
+          <p:cNvPr id="28" name="text-338"/>
+          <p:cNvSpPr txBox="1"/>
+          <p:nvPr/>
+        </p:nvSpPr>
+        <p:spPr>
+          <a:xfrm>
+            <a:off x="6766560" y="4023360"/>
+            <a:ext cx="4846320" cy="347472"/>
+          </a:xfrm>
+          <a:prstGeom prst="rect">
+            <a:avLst/>
+          </a:prstGeom>
+          <a:noFill/>
+          <a:ln/>
+        </p:spPr>
+        <p:txBody>
+          <a:bodyPr wrap="square" lIns="0" tIns="0" rIns="0" bIns="0" rtlCol="0" anchor="t"/>
+          <a:lstStyle/>
+          <a:p>
+            <a:pPr indent="0" marL="0">
+              <a:buNone/>
+            </a:pPr>
+            <a:r>
+              <a:rPr lang="en-US" sz="1400" b="1" dirty="0">
+                <a:solidFill>
+                  <a:srgbClr val="191F28"/>
+                </a:solidFill>
+              </a:rPr>
+              <a:t>지면 조립 틀</a:t>
+            </a:r>
+            <a:endParaRPr lang="en-US" sz="1400" dirty="0"/>
+          </a:p>
+        </p:txBody>
+      </p:sp>
+      <p:sp>
+        <p:nvSpPr>
+          <p:cNvPr id="29" name="text-339"/>
+          <p:cNvSpPr txBox="1"/>
+          <p:nvPr/>
+        </p:nvSpPr>
+        <p:spPr>
+          <a:xfrm>
+            <a:off x="6766560" y="4389120"/>
+            <a:ext cx="4846320" cy="731520"/>
+          </a:xfrm>
+          <a:prstGeom prst="rect">
+            <a:avLst/>
+          </a:prstGeom>
+          <a:noFill/>
+          <a:ln/>
+        </p:spPr>
+        <p:txBody>
+          <a:bodyPr wrap="square" lIns="0" tIns="0" rIns="0" bIns="0" rtlCol="0" anchor="t"/>
+          <a:lstStyle/>
+          <a:p>
+            <a:pPr indent="0" marL="0">
+              <a:buNone/>
+            </a:pPr>
+            <a:r>
+              <a:rPr lang="en-US" sz="1150" dirty="0">
+                <a:solidFill>
+                  <a:srgbClr val="4E5968"/>
+                </a:solidFill>
+              </a:rPr>
+              <a:t>MeAI 가 쓴 문장을 Key Point 상자 자리에 넣으면 그대로 20쪽 PDF. 표지 · 요약 · 담보 지도 · 면책감액표는 생성기가 채운다</a:t>
+            </a:r>
+            <a:endParaRPr lang="en-US" sz="1150" dirty="0"/>
+          </a:p>
+        </p:txBody>
+      </p:sp>
+      <p:sp>
+        <p:nvSpPr>
+          <p:cNvPr id="30" name="circ-340"/>
+          <p:cNvSpPr/>
+          <p:nvPr/>
+        </p:nvSpPr>
+        <p:spPr>
+          <a:xfrm>
+            <a:off x="6016752" y="5056632"/>
+            <a:ext cx="621792" cy="621792"/>
+          </a:xfrm>
+          <a:prstGeom prst="ellipse">
+            <a:avLst/>
+          </a:prstGeom>
+          <a:solidFill>
+            <a:srgbClr val="E8F3FF"/>
+          </a:solidFill>
+          <a:ln w="12700">
+            <a:solidFill>
+              <a:srgbClr val="E8F3FF"/>
+            </a:solidFill>
+            <a:prstDash val="solid"/>
+          </a:ln>
+        </p:spPr>
+      </p:sp>
+      <p:pic>
+        <p:nvPicPr>
+          <p:cNvPr id="31" name="icon-341" descr="icons/shield_b.png">    </p:cNvPr>
+          <p:cNvPicPr>
+            <a:picLocks noChangeAspect="1"/>
+          </p:cNvPicPr>
+          <p:nvPr/>
+        </p:nvPicPr>
+        <p:blipFill>
+          <a:blip r:embed="rId4"/>
+          <a:stretch>
+            <a:fillRect/>
+          </a:stretch>
+        </p:blipFill>
+        <p:spPr>
+          <a:xfrm>
+            <a:off x="6172200" y="5212080"/>
+            <a:ext cx="310896" cy="310896"/>
+          </a:xfrm>
+          <a:prstGeom prst="rect">
+            <a:avLst/>
+          </a:prstGeom>
+        </p:spPr>
+      </p:pic>
+      <p:sp>
+        <p:nvSpPr>
+          <p:cNvPr id="32" name="text-342"/>
+          <p:cNvSpPr txBox="1"/>
+          <p:nvPr/>
+        </p:nvSpPr>
+        <p:spPr>
+          <a:xfrm>
+            <a:off x="6766560" y="5166360"/>
+            <a:ext cx="4846320" cy="347472"/>
+          </a:xfrm>
+          <a:prstGeom prst="rect">
+            <a:avLst/>
+          </a:prstGeom>
+          <a:noFill/>
+          <a:ln/>
+        </p:spPr>
+        <p:txBody>
+          <a:bodyPr wrap="square" lIns="0" tIns="0" rIns="0" bIns="0" rtlCol="0" anchor="t"/>
+          <a:lstStyle/>
+          <a:p>
+            <a:pPr indent="0" marL="0">
+              <a:buNone/>
+            </a:pPr>
+            <a:r>
+              <a:rPr lang="en-US" sz="1400" b="1" dirty="0">
+                <a:solidFill>
+                  <a:srgbClr val="191F28"/>
+                </a:solidFill>
+              </a:rPr>
+              <a:t>검증 장치</a:t>
+            </a:r>
+            <a:endParaRPr lang="en-US" sz="1400" dirty="0"/>
+          </a:p>
+        </p:txBody>
+      </p:sp>
+      <p:sp>
+        <p:nvSpPr>
+          <p:cNvPr id="33" name="text-343"/>
+          <p:cNvSpPr txBox="1"/>
+          <p:nvPr/>
+        </p:nvSpPr>
+        <p:spPr>
+          <a:xfrm>
+            <a:off x="6766560" y="5532120"/>
+            <a:ext cx="4846320" cy="731520"/>
+          </a:xfrm>
+          <a:prstGeom prst="rect">
+            <a:avLst/>
+          </a:prstGeom>
+          <a:noFill/>
+          <a:ln/>
+        </p:spPr>
+        <p:txBody>
+          <a:bodyPr wrap="square" lIns="0" tIns="0" rIns="0" bIns="0" rtlCol="0" anchor="t"/>
+          <a:lstStyle/>
+          <a:p>
+            <a:pPr indent="0" marL="0">
+              <a:buNone/>
+            </a:pPr>
+            <a:r>
+              <a:rPr lang="en-US" sz="1150" dirty="0">
+                <a:solidFill>
+                  <a:srgbClr val="4E5968"/>
+                </a:solidFill>
+              </a:rPr>
+              <a:t>「추정하지 않는다」 규칙 · 약관 분류번호 대조 · 회귀 점검을 MeAI 출력에도 적용 → 틀린 숫자 대신 빈칸과 사유</a:t>
+            </a:r>
+            <a:endParaRPr lang="en-US" sz="1150" dirty="0"/>
+          </a:p>
+        </p:txBody>
+      </p:sp>
+      <p:sp>
+        <p:nvSpPr>
+          <p:cNvPr id="34" name="text-344"/>
+          <p:cNvSpPr txBox="1"/>
+          <p:nvPr/>
+        </p:nvSpPr>
+        <p:spPr>
+          <a:xfrm>
+            <a:off x="548640" y="5943600"/>
+            <a:ext cx="11064240" cy="411480"/>
+          </a:xfrm>
+          <a:prstGeom prst="rect">
+            <a:avLst/>
+          </a:prstGeom>
+          <a:noFill/>
+          <a:ln/>
+        </p:spPr>
+        <p:txBody>
+          <a:bodyPr wrap="square" lIns="0" tIns="0" rIns="0" bIns="0" rtlCol="0" anchor="t"/>
+          <a:lstStyle/>
+          <a:p>
+            <a:pPr indent="0" marL="0">
+              <a:buNone/>
+            </a:pPr>
+            <a:r>
+              <a:rPr lang="en-US" sz="1100" dirty="0">
+                <a:solidFill>
+                  <a:srgbClr val="1B64DA"/>
+                </a:solidFill>
+              </a:rPr>
+              <a:t>단계 제안 : ① 지금 — 오프라인 생성기로 현장 검증  ② 프롬프트 라이브러리 · 특약검색기의 「MeAI 프롬프트 자동 생성」과 연결  ③ MeAI 리포트 생성에 특약 마스터 · 조립 틀 연동</a:t>
+            </a:r>
+            <a:endParaRPr lang="en-US" sz="1100" dirty="0"/>
+          </a:p>
+        </p:txBody>
+      </p:sp>
+      <p:sp>
+        <p:nvSpPr>
+          <p:cNvPr id="25" name="Slide Number Placeholder 0"/>
+          <p:cNvSpPr>
+            <a:spLocks noGrp="1"/>
+          </p:cNvSpPr>
+          <p:nvPr>
+            <p:ph type="sldNum" sz="quarter" idx="4294967295"/>
+          </p:nvPr>
+        </p:nvSpPr>
+        <p:spPr>
+          <a:xfrm>
+            <a:off x="10911535" y="6419088"/>
+            <a:ext cx="731520" cy="274320"/>
+          </a:xfrm>
+          <a:prstGeom prst="rect">
+            <a:avLst/>
+          </a:prstGeom>
+          <a:extLst>
+            <a:ext uri="{C572A759-6A51-4108-AA02-DFA0A04FC94B}">
+              <ma14:wrappingTextBoxFlag xmlns:ma14="http://schemas.microsoft.com/office/mac/drawingml/2011/main" val="0"/>
+            </a:ext>
+          </a:extLst>
+        </p:spPr>
+        <p:txBody>
+          <a:bodyPr/>
+          <a:lstStyle>
+            <a:lvl1pPr>
+              <a:defRPr sz="900">
+                <a:solidFill>
+                  <a:srgbClr val="8B95A1"/>
+                </a:solidFill>
+              </a:defRPr>
+            </a:lvl1pPr>
+          </a:lstStyle>
+          <a:p>
+            <a:pPr algn="r"/>
+            <a:fld id="{F7021451-1387-4CA6-816F-3879F97B5CBC}" type="slidenum">
+              <a:rPr b="0" lang="en-US"/>
+              <a:t>17</a:t>
+            </a:fld>
+            <a:endParaRPr lang="en-US"/>
+          </a:p>
+        </p:txBody>
+      </p:sp>
+    </p:spTree>
+  </p:cSld>
+  <p:clrMapOvr>
+    <a:masterClrMapping/>
+  </p:clrMapOvr>
+</p:sld>
+</file>
+
+<file path=ppt/slides/slide18.xml><?xml version="1.0" encoding="utf-8"?>
+<p:sld xmlns:a="http://schemas.openxmlformats.org/drawingml/2006/main" xmlns:r="http://schemas.openxmlformats.org/officeDocument/2006/relationships" xmlns:p="http://schemas.openxmlformats.org/presentationml/2006/main">
+  <p:cSld name="Slide 18">
+    <p:spTree>
+      <p:nvGrpSpPr>
+        <p:cNvPr id="1" name=""/>
+        <p:cNvGrpSpPr/>
+        <p:nvPr/>
+      </p:nvGrpSpPr>
+      <p:grpSpPr>
+        <a:xfrm>
+          <a:off x="0" y="0"/>
+          <a:ext cx="0" cy="0"/>
+          <a:chOff x="0" y="0"/>
+          <a:chExt cx="0" cy="0"/>
+        </a:xfrm>
+      </p:grpSpPr>
+      <p:sp>
+        <p:nvSpPr>
+          <p:cNvPr id="2" name="Text 0"/>
+          <p:cNvSpPr/>
+          <p:nvPr>
+            <p:ph idx="100" type="title" hasCustomPrompt="1"/>
+          </p:nvPr>
+        </p:nvSpPr>
+        <p:spPr>
+          <a:xfrm>
+            <a:off x="548640" y="384048"/>
+            <a:ext cx="11094415" cy="731520"/>
+          </a:xfrm>
+          <a:prstGeom prst="rect">
+            <a:avLst/>
+          </a:prstGeom>
+          <a:noFill/>
+          <a:ln/>
+        </p:spPr>
+        <p:txBody>
+          <a:bodyPr wrap="square" lIns="0" tIns="0" rIns="0" bIns="0" rtlCol="0" anchor="t"/>
+          <a:lstStyle/>
+          <a:p>
+            <a:pPr algn="l" indent="0" marL="0">
+              <a:buNone/>
+            </a:pPr>
+            <a:r>
+              <a:rPr lang="en-US" sz="2800" b="1" dirty="0">
+                <a:solidFill>
+                  <a:srgbClr val="191F28"/>
+                </a:solidFill>
+              </a:rPr>
+              <a:t>다음 단계</a:t>
+            </a:r>
+            <a:endParaRPr lang="en-US" sz="2800" dirty="0"/>
+          </a:p>
+        </p:txBody>
+      </p:sp>
+      <p:sp>
+        <p:nvSpPr>
+          <p:cNvPr id="3" name="Text 0"/>
+          <p:cNvSpPr/>
+          <p:nvPr>
+            <p:ph idx="101" type="body" hasCustomPrompt="1"/>
+          </p:nvPr>
+        </p:nvSpPr>
+        <p:spPr>
+          <a:xfrm>
+            <a:off x="548640" y="1024128"/>
+            <a:ext cx="11094415" cy="457200"/>
+          </a:xfrm>
+          <a:prstGeom prst="rect">
+            <a:avLst/>
+          </a:prstGeom>
+          <a:noFill/>
+          <a:ln/>
+        </p:spPr>
+        <p:txBody>
+          <a:bodyPr wrap="square" lIns="0" tIns="0" rIns="0" bIns="0" rtlCol="0" anchor="t"/>
+          <a:lstStyle/>
+          <a:p>
+            <a:pPr algn="l" indent="0" marL="0">
+              <a:buNone/>
+            </a:pPr>
+            <a:r>
+              <a:rPr lang="en-US" sz="1400" dirty="0">
+                <a:solidFill>
+                  <a:srgbClr val="4E5968"/>
+                </a:solidFill>
+              </a:rPr>
+              <a:t>프로토타입은 완성돼 있습니다 — 이제 현장에서 써 보고 내용을 키울 차례</a:t>
+            </a:r>
+            <a:endParaRPr lang="en-US" sz="1400" dirty="0"/>
+          </a:p>
+        </p:txBody>
+      </p:sp>
+      <p:sp>
+        <p:nvSpPr>
+          <p:cNvPr id="4" name="card-345"/>
+          <p:cNvSpPr/>
+          <p:nvPr/>
+        </p:nvSpPr>
+        <p:spPr>
+          <a:xfrm>
+            <a:off x="548640" y="1783080"/>
             <a:ext cx="5440680" cy="1508760"/>
           </a:xfrm>
           <a:prstGeom prst="roundRect">
@@ -8938,13 +10054,13 @@
       </p:sp>
       <p:sp>
         <p:nvSpPr>
-          <p:cNvPr id="8" name="text-317"/>
-          <p:cNvSpPr txBox="1"/>
-          <p:nvPr/>
-        </p:nvSpPr>
-        <p:spPr>
-          <a:xfrm>
-            <a:off x="6446520" y="1984248"/>
+          <p:cNvPr id="5" name="text-346"/>
+          <p:cNvSpPr txBox="1"/>
+          <p:nvPr/>
+        </p:nvSpPr>
+        <p:spPr>
+          <a:xfrm>
+            <a:off x="822960" y="1984248"/>
             <a:ext cx="4937760" cy="365760"/>
           </a:xfrm>
           <a:prstGeom prst="rect">
@@ -8966,7 +10082,7 @@
                   <a:srgbClr val="3182F6"/>
                 </a:solidFill>
               </a:rPr>
-              <a:t>② Key Point 창고 확장</a:t>
+              <a:t>① 시범 운영</a:t>
             </a:r>
             <a:endParaRPr lang="en-US" sz="1500" dirty="0"/>
           </a:p>
@@ -8974,13 +10090,13 @@
       </p:sp>
       <p:sp>
         <p:nvSpPr>
-          <p:cNvPr id="9" name="text-318"/>
-          <p:cNvSpPr txBox="1"/>
-          <p:nvPr/>
-        </p:nvSpPr>
-        <p:spPr>
-          <a:xfrm>
-            <a:off x="6446520" y="2377440"/>
+          <p:cNvPr id="6" name="text-347"/>
+          <p:cNvSpPr txBox="1"/>
+          <p:nvPr/>
+        </p:nvSpPr>
+        <p:spPr>
+          <a:xfrm>
+            <a:off x="822960" y="2377440"/>
             <a:ext cx="4937760" cy="868680"/>
           </a:xfrm>
           <a:prstGeom prst="rect">
@@ -9002,7 +10118,7 @@
                   <a:srgbClr val="4E5968"/>
                 </a:solidFill>
               </a:rPr>
-              <a:t>36종 → 상품별 주요 특약 전부. 현장에서 「이 담보 설명이 아쉽다」는 의견을 창고에 바로 반영합니다.</a:t>
+              <a:t>세일즈혁신TF 인접 조직 설계사 30명 · 4주. 생성 시간 · 매칭률 · 상담 활용도를 실측해 가정값을 대체합니다.</a:t>
             </a:r>
             <a:endParaRPr lang="en-US" sz="1200" dirty="0"/>
           </a:p>
@@ -9010,13 +10126,13 @@
       </p:sp>
       <p:sp>
         <p:nvSpPr>
-          <p:cNvPr id="10" name="card-319"/>
+          <p:cNvPr id="7" name="card-348"/>
           <p:cNvSpPr/>
           <p:nvPr/>
         </p:nvSpPr>
         <p:spPr>
           <a:xfrm>
-            <a:off x="548640" y="3474720"/>
+            <a:off x="6172200" y="1783080"/>
             <a:ext cx="5440680" cy="1508760"/>
           </a:xfrm>
           <a:prstGeom prst="roundRect">
@@ -9037,13 +10153,13 @@
       </p:sp>
       <p:sp>
         <p:nvSpPr>
-          <p:cNvPr id="11" name="text-320"/>
-          <p:cNvSpPr txBox="1"/>
-          <p:nvPr/>
-        </p:nvSpPr>
-        <p:spPr>
-          <a:xfrm>
-            <a:off x="822960" y="3675888"/>
+          <p:cNvPr id="8" name="text-349"/>
+          <p:cNvSpPr txBox="1"/>
+          <p:nvPr/>
+        </p:nvSpPr>
+        <p:spPr>
+          <a:xfrm>
+            <a:off x="6446520" y="1984248"/>
             <a:ext cx="4937760" cy="365760"/>
           </a:xfrm>
           <a:prstGeom prst="rect">
@@ -9065,7 +10181,7 @@
                   <a:srgbClr val="3182F6"/>
                 </a:solidFill>
               </a:rPr>
-              <a:t>③ 전 상품 확대</a:t>
+              <a:t>② Key Point 창고 확장</a:t>
             </a:r>
             <a:endParaRPr lang="en-US" sz="1500" dirty="0"/>
           </a:p>
@@ -9073,13 +10189,13 @@
       </p:sp>
       <p:sp>
         <p:nvSpPr>
-          <p:cNvPr id="12" name="text-321"/>
-          <p:cNvSpPr txBox="1"/>
-          <p:nvPr/>
-        </p:nvSpPr>
-        <p:spPr>
-          <a:xfrm>
-            <a:off x="822960" y="4069080"/>
+          <p:cNvPr id="9" name="text-350"/>
+          <p:cNvSpPr txBox="1"/>
+          <p:nvPr/>
+        </p:nvSpPr>
+        <p:spPr>
+          <a:xfrm>
+            <a:off x="6446520" y="2377440"/>
             <a:ext cx="4937760" cy="868680"/>
           </a:xfrm>
           <a:prstGeom prst="rect">
@@ -9101,7 +10217,7 @@
                   <a:srgbClr val="4E5968"/>
                 </a:solidFill>
               </a:rPr>
-              <a:t>판매 중 상품 약관을 순차 추가. 약관 파싱 → 마스터 → 세 도구 동시 갱신 흐름은 이미 갖춰져 있습니다.</a:t>
+              <a:t>36종 → 상품별 주요 특약 전부. 현장에서 「이 담보 설명이 아쉽다」는 의견을 창고에 바로 반영합니다.</a:t>
             </a:r>
             <a:endParaRPr lang="en-US" sz="1200" dirty="0"/>
           </a:p>
@@ -9109,13 +10225,13 @@
       </p:sp>
       <p:sp>
         <p:nvSpPr>
-          <p:cNvPr id="13" name="card-322"/>
+          <p:cNvPr id="10" name="card-351"/>
           <p:cNvSpPr/>
           <p:nvPr/>
         </p:nvSpPr>
         <p:spPr>
           <a:xfrm>
-            <a:off x="6172200" y="3474720"/>
+            <a:off x="548640" y="3474720"/>
             <a:ext cx="5440680" cy="1508760"/>
           </a:xfrm>
           <a:prstGeom prst="roundRect">
@@ -9136,7 +10252,106 @@
       </p:sp>
       <p:sp>
         <p:nvSpPr>
-          <p:cNvPr id="14" name="text-323"/>
+          <p:cNvPr id="11" name="text-352"/>
+          <p:cNvSpPr txBox="1"/>
+          <p:nvPr/>
+        </p:nvSpPr>
+        <p:spPr>
+          <a:xfrm>
+            <a:off x="822960" y="3675888"/>
+            <a:ext cx="4937760" cy="365760"/>
+          </a:xfrm>
+          <a:prstGeom prst="rect">
+            <a:avLst/>
+          </a:prstGeom>
+          <a:noFill/>
+          <a:ln/>
+        </p:spPr>
+        <p:txBody>
+          <a:bodyPr wrap="square" lIns="0" tIns="0" rIns="0" bIns="0" rtlCol="0" anchor="t"/>
+          <a:lstStyle/>
+          <a:p>
+            <a:pPr indent="0" marL="0">
+              <a:buNone/>
+            </a:pPr>
+            <a:r>
+              <a:rPr lang="en-US" sz="1500" b="1" dirty="0">
+                <a:solidFill>
+                  <a:srgbClr val="3182F6"/>
+                </a:solidFill>
+              </a:rPr>
+              <a:t>③ 전 상품 확대 · MeAI 연동 준비</a:t>
+            </a:r>
+            <a:endParaRPr lang="en-US" sz="1500" dirty="0"/>
+          </a:p>
+        </p:txBody>
+      </p:sp>
+      <p:sp>
+        <p:nvSpPr>
+          <p:cNvPr id="12" name="text-353"/>
+          <p:cNvSpPr txBox="1"/>
+          <p:nvPr/>
+        </p:nvSpPr>
+        <p:spPr>
+          <a:xfrm>
+            <a:off x="822960" y="4069080"/>
+            <a:ext cx="4937760" cy="868680"/>
+          </a:xfrm>
+          <a:prstGeom prst="rect">
+            <a:avLst/>
+          </a:prstGeom>
+          <a:noFill/>
+          <a:ln/>
+        </p:spPr>
+        <p:txBody>
+          <a:bodyPr wrap="square" lIns="0" tIns="0" rIns="0" bIns="0" rtlCol="0" anchor="t"/>
+          <a:lstStyle/>
+          <a:p>
+            <a:pPr indent="0" marL="0">
+              <a:buNone/>
+            </a:pPr>
+            <a:r>
+              <a:rPr lang="en-US" sz="1200" dirty="0">
+                <a:solidFill>
+                  <a:srgbClr val="4E5968"/>
+                </a:solidFill>
+              </a:rPr>
+              <a:t>판매 중 상품 약관을 순차 추가하고, 특약 마스터 · 조립 틀을 MeAI 리포트 생성에 넘길 수 있는 형태로 정리합니다(앞 쪽 제언).</a:t>
+            </a:r>
+            <a:endParaRPr lang="en-US" sz="1200" dirty="0"/>
+          </a:p>
+        </p:txBody>
+      </p:sp>
+      <p:sp>
+        <p:nvSpPr>
+          <p:cNvPr id="13" name="card-354"/>
+          <p:cNvSpPr/>
+          <p:nvPr/>
+        </p:nvSpPr>
+        <p:spPr>
+          <a:xfrm>
+            <a:off x="6172200" y="3474720"/>
+            <a:ext cx="5440680" cy="1508760"/>
+          </a:xfrm>
+          <a:prstGeom prst="roundRect">
+            <a:avLst>
+              <a:gd name="adj" fmla="val 9697"/>
+            </a:avLst>
+          </a:prstGeom>
+          <a:solidFill>
+            <a:srgbClr val="F2F4F6"/>
+          </a:solidFill>
+          <a:ln w="12700">
+            <a:solidFill>
+              <a:srgbClr val="F2F4F6"/>
+            </a:solidFill>
+            <a:prstDash val="solid"/>
+          </a:ln>
+        </p:spPr>
+      </p:sp>
+      <p:sp>
+        <p:nvSpPr>
+          <p:cNvPr id="14" name="text-355"/>
           <p:cNvSpPr txBox="1"/>
           <p:nvPr/>
         </p:nvSpPr>
@@ -9172,7 +10387,7 @@
       </p:sp>
       <p:sp>
         <p:nvSpPr>
-          <p:cNvPr id="15" name="text-324"/>
+          <p:cNvPr id="15" name="text-356"/>
           <p:cNvSpPr txBox="1"/>
           <p:nvPr/>
         </p:nvSpPr>
@@ -9208,7 +10423,7 @@
       </p:sp>
       <p:sp>
         <p:nvSpPr>
-          <p:cNvPr id="16" name="card-325"/>
+          <p:cNvPr id="16" name="card-357"/>
           <p:cNvSpPr/>
           <p:nvPr/>
         </p:nvSpPr>
@@ -9235,7 +10450,7 @@
       </p:sp>
       <p:pic>
         <p:nvPicPr>
-          <p:cNvPr id="17" name="icon-326" descr="icons/chat_w.png">    </p:cNvPr>
+          <p:cNvPr id="17" name="icon-358" descr="icons/chat_w.png">    </p:cNvPr>
           <p:cNvPicPr>
             <a:picLocks noChangeAspect="1"/>
           </p:cNvPicPr>
@@ -9259,7 +10474,7 @@
       </p:pic>
       <p:sp>
         <p:nvSpPr>
-          <p:cNvPr id="18" name="text-327"/>
+          <p:cNvPr id="18" name="text-359"/>
           <p:cNvSpPr txBox="1"/>
           <p:nvPr/>
         </p:nvSpPr>
@@ -9295,7 +10510,7 @@
       </p:sp>
       <p:sp>
         <p:nvSpPr>
-          <p:cNvPr id="19" name="text-328"/>
+          <p:cNvPr id="19" name="text-360"/>
           <p:cNvSpPr txBox="1"/>
           <p:nvPr/>
         </p:nvSpPr>
@@ -9368,7 +10583,7 @@
             <a:pPr algn="r"/>
             <a:fld id="{F7021451-1387-4CA6-816F-3879F97B5CBC}" type="slidenum">
               <a:rPr b="0" lang="en-US"/>
-              <a:t>17</a:t>
+              <a:t>18</a:t>
             </a:fld>
             <a:endParaRPr lang="en-US"/>
           </a:p>
@@ -9910,8 +11125,8 @@
         </p:nvSpPr>
         <p:spPr>
           <a:xfrm>
-            <a:off x="548640" y="5257800"/>
-            <a:ext cx="6766560" cy="548640"/>
+            <a:off x="548640" y="5212080"/>
+            <a:ext cx="6766560" cy="457200"/>
           </a:xfrm>
           <a:prstGeom prst="rect">
             <a:avLst/>
@@ -9927,6 +11142,42 @@
               <a:buNone/>
             </a:pPr>
             <a:r>
+              <a:rPr lang="en-US" sz="1150" b="1" dirty="0">
+                <a:solidFill>
+                  <a:srgbClr val="3182F6"/>
+                </a:solidFill>
+              </a:rPr>
+              <a:t>이 생성기는 MeAI 고도화를 위한 선행 과제입니다 — 약관을 읽어 만든 데이터와 지면 틀을 MeAI 리포트 생성의 재료로 잇는 제언을 뒤에 적었습니다.</a:t>
+            </a:r>
+            <a:endParaRPr lang="en-US" sz="1150" dirty="0"/>
+          </a:p>
+        </p:txBody>
+      </p:sp>
+      <p:sp>
+        <p:nvSpPr>
+          <p:cNvPr id="16" name="text-20"/>
+          <p:cNvSpPr txBox="1"/>
+          <p:nvPr/>
+        </p:nvSpPr>
+        <p:spPr>
+          <a:xfrm>
+            <a:off x="548640" y="5715000"/>
+            <a:ext cx="6766560" cy="457200"/>
+          </a:xfrm>
+          <a:prstGeom prst="rect">
+            <a:avLst/>
+          </a:prstGeom>
+          <a:noFill/>
+          <a:ln/>
+        </p:spPr>
+        <p:txBody>
+          <a:bodyPr wrap="square" lIns="0" tIns="0" rIns="0" bIns="0" rtlCol="0" anchor="t"/>
+          <a:lstStyle/>
+          <a:p>
+            <a:pPr indent="0" marL="0">
+              <a:buNone/>
+            </a:pPr>
+            <a:r>
               <a:rPr lang="en-US" sz="1050" dirty="0">
                 <a:solidFill>
                   <a:srgbClr val="8B95A1"/>
@@ -9940,7 +11191,7 @@
       </p:sp>
       <p:sp>
         <p:nvSpPr>
-          <p:cNvPr id="16" name="frame-20"/>
+          <p:cNvPr id="17" name="frame-21"/>
           <p:cNvSpPr/>
           <p:nvPr/>
         </p:nvSpPr>
@@ -9974,7 +11225,7 @@
       </p:sp>
       <p:pic>
         <p:nvPicPr>
-          <p:cNvPr id="17" name="pic-21" descr="shots/page_02.png">    </p:cNvPr>
+          <p:cNvPr id="18" name="pic-22" descr="shots/page_02.png">    </p:cNvPr>
           <p:cNvPicPr>
             <a:picLocks noChangeAspect="1"/>
           </p:cNvPicPr>
@@ -9998,7 +11249,7 @@
       </p:pic>
       <p:sp>
         <p:nvSpPr>
-          <p:cNvPr id="18" name="badge-22"/>
+          <p:cNvPr id="19" name="badge-23"/>
           <p:cNvSpPr/>
           <p:nvPr/>
         </p:nvSpPr>
@@ -10025,7 +11276,7 @@
       </p:sp>
       <p:sp>
         <p:nvSpPr>
-          <p:cNvPr id="19" name="text-23"/>
+          <p:cNvPr id="20" name="text-24"/>
           <p:cNvSpPr txBox="1"/>
           <p:nvPr/>
         </p:nvSpPr>
@@ -10207,7 +11458,7 @@
       </p:sp>
       <p:sp>
         <p:nvSpPr>
-          <p:cNvPr id="4" name="card-24"/>
+          <p:cNvPr id="4" name="card-25"/>
           <p:cNvSpPr/>
           <p:nvPr/>
         </p:nvSpPr>
@@ -10241,7 +11492,7 @@
       </p:sp>
       <p:sp>
         <p:nvSpPr>
-          <p:cNvPr id="5" name="circ-25"/>
+          <p:cNvPr id="5" name="circ-26"/>
           <p:cNvSpPr/>
           <p:nvPr/>
         </p:nvSpPr>
@@ -10266,7 +11517,7 @@
       </p:sp>
       <p:pic>
         <p:nvPicPr>
-          <p:cNvPr id="6" name="icon-26" descr="icons/warn_r.png">    </p:cNvPr>
+          <p:cNvPr id="6" name="icon-27" descr="icons/warn_r.png">    </p:cNvPr>
           <p:cNvPicPr>
             <a:picLocks noChangeAspect="1"/>
           </p:cNvPicPr>
@@ -10290,7 +11541,7 @@
       </p:pic>
       <p:sp>
         <p:nvSpPr>
-          <p:cNvPr id="7" name="text-27"/>
+          <p:cNvPr id="7" name="text-28"/>
           <p:cNvSpPr txBox="1"/>
           <p:nvPr/>
         </p:nvSpPr>
@@ -10326,7 +11577,7 @@
       </p:sp>
       <p:sp>
         <p:nvSpPr>
-          <p:cNvPr id="8" name="text-28"/>
+          <p:cNvPr id="8" name="text-29"/>
           <p:cNvSpPr txBox="1"/>
           <p:nvPr/>
         </p:nvSpPr>
@@ -10365,7 +11616,7 @@
       </p:sp>
       <p:sp>
         <p:nvSpPr>
-          <p:cNvPr id="9" name="card-29"/>
+          <p:cNvPr id="9" name="card-30"/>
           <p:cNvSpPr/>
           <p:nvPr/>
         </p:nvSpPr>
@@ -10399,7 +11650,7 @@
       </p:sp>
       <p:sp>
         <p:nvSpPr>
-          <p:cNvPr id="10" name="circ-30"/>
+          <p:cNvPr id="10" name="circ-31"/>
           <p:cNvSpPr/>
           <p:nvPr/>
         </p:nvSpPr>
@@ -10424,7 +11675,7 @@
       </p:sp>
       <p:pic>
         <p:nvPicPr>
-          <p:cNvPr id="11" name="icon-31" descr="icons/book_r.png">    </p:cNvPr>
+          <p:cNvPr id="11" name="icon-32" descr="icons/book_r.png">    </p:cNvPr>
           <p:cNvPicPr>
             <a:picLocks noChangeAspect="1"/>
           </p:cNvPicPr>
@@ -10448,7 +11699,7 @@
       </p:pic>
       <p:sp>
         <p:nvSpPr>
-          <p:cNvPr id="12" name="text-32"/>
+          <p:cNvPr id="12" name="text-33"/>
           <p:cNvSpPr txBox="1"/>
           <p:nvPr/>
         </p:nvSpPr>
@@ -10484,7 +11735,7 @@
       </p:sp>
       <p:sp>
         <p:nvSpPr>
-          <p:cNvPr id="13" name="text-33"/>
+          <p:cNvPr id="13" name="text-34"/>
           <p:cNvSpPr txBox="1"/>
           <p:nvPr/>
         </p:nvSpPr>
@@ -10523,7 +11774,7 @@
       </p:sp>
       <p:sp>
         <p:nvSpPr>
-          <p:cNvPr id="14" name="card-34"/>
+          <p:cNvPr id="14" name="card-35"/>
           <p:cNvSpPr/>
           <p:nvPr/>
         </p:nvSpPr>
@@ -10557,7 +11808,7 @@
       </p:sp>
       <p:sp>
         <p:nvSpPr>
-          <p:cNvPr id="15" name="circ-35"/>
+          <p:cNvPr id="15" name="circ-36"/>
           <p:cNvSpPr/>
           <p:nvPr/>
         </p:nvSpPr>
@@ -10582,7 +11833,7 @@
       </p:sp>
       <p:pic>
         <p:nvPicPr>
-          <p:cNvPr id="16" name="icon-36" descr="icons/clock_r.png">    </p:cNvPr>
+          <p:cNvPr id="16" name="icon-37" descr="icons/clock_r.png">    </p:cNvPr>
           <p:cNvPicPr>
             <a:picLocks noChangeAspect="1"/>
           </p:cNvPicPr>
@@ -10606,7 +11857,7 @@
       </p:pic>
       <p:sp>
         <p:nvSpPr>
-          <p:cNvPr id="17" name="text-37"/>
+          <p:cNvPr id="17" name="text-38"/>
           <p:cNvSpPr txBox="1"/>
           <p:nvPr/>
         </p:nvSpPr>
@@ -10642,7 +11893,7 @@
       </p:sp>
       <p:sp>
         <p:nvSpPr>
-          <p:cNvPr id="18" name="text-38"/>
+          <p:cNvPr id="18" name="text-39"/>
           <p:cNvSpPr txBox="1"/>
           <p:nvPr/>
         </p:nvSpPr>
@@ -10681,7 +11932,7 @@
       </p:sp>
       <p:sp>
         <p:nvSpPr>
-          <p:cNvPr id="19" name="text-39"/>
+          <p:cNvPr id="19" name="text-40"/>
           <p:cNvSpPr txBox="1"/>
           <p:nvPr/>
         </p:nvSpPr>
@@ -10863,7 +12114,7 @@
       </p:sp>
       <p:sp>
         <p:nvSpPr>
-          <p:cNvPr id="4" name="card-40"/>
+          <p:cNvPr id="4" name="card-41"/>
           <p:cNvSpPr/>
           <p:nvPr/>
         </p:nvSpPr>
@@ -10890,7 +12141,7 @@
       </p:sp>
       <p:sp>
         <p:nvSpPr>
-          <p:cNvPr id="5" name="circ-41"/>
+          <p:cNvPr id="5" name="circ-42"/>
           <p:cNvSpPr/>
           <p:nvPr/>
         </p:nvSpPr>
@@ -10915,7 +12166,7 @@
       </p:sp>
       <p:pic>
         <p:nvPicPr>
-          <p:cNvPr id="6" name="icon-42" descr="icons/upload_b.png">    </p:cNvPr>
+          <p:cNvPr id="6" name="icon-43" descr="icons/upload_b.png">    </p:cNvPr>
           <p:cNvPicPr>
             <a:picLocks noChangeAspect="1"/>
           </p:cNvPicPr>
@@ -10939,7 +12190,7 @@
       </p:pic>
       <p:sp>
         <p:nvSpPr>
-          <p:cNvPr id="7" name="dot-43"/>
+          <p:cNvPr id="7" name="dot-44"/>
           <p:cNvSpPr/>
           <p:nvPr/>
         </p:nvSpPr>
@@ -10964,7 +12215,7 @@
       </p:sp>
       <p:sp>
         <p:nvSpPr>
-          <p:cNvPr id="8" name="text-44"/>
+          <p:cNvPr id="8" name="text-45"/>
           <p:cNvSpPr txBox="1"/>
           <p:nvPr/>
         </p:nvSpPr>
@@ -11000,7 +12251,7 @@
       </p:sp>
       <p:sp>
         <p:nvSpPr>
-          <p:cNvPr id="9" name="text-45"/>
+          <p:cNvPr id="9" name="text-46"/>
           <p:cNvSpPr txBox="1"/>
           <p:nvPr/>
         </p:nvSpPr>
@@ -11036,7 +12287,7 @@
       </p:sp>
       <p:sp>
         <p:nvSpPr>
-          <p:cNvPr id="10" name="text-46"/>
+          <p:cNvPr id="10" name="text-47"/>
           <p:cNvSpPr txBox="1"/>
           <p:nvPr/>
         </p:nvSpPr>
@@ -11075,7 +12326,7 @@
       </p:sp>
       <p:pic>
         <p:nvPicPr>
-          <p:cNvPr id="11" name="icon-47" descr="icons/arrow_b.png">    </p:cNvPr>
+          <p:cNvPr id="11" name="icon-48" descr="icons/arrow_b.png">    </p:cNvPr>
           <p:cNvPicPr>
             <a:picLocks noChangeAspect="1"/>
           </p:cNvPicPr>
@@ -11099,7 +12350,7 @@
       </p:pic>
       <p:sp>
         <p:nvSpPr>
-          <p:cNvPr id="12" name="card-48"/>
+          <p:cNvPr id="12" name="card-49"/>
           <p:cNvSpPr/>
           <p:nvPr/>
         </p:nvSpPr>
@@ -11126,7 +12377,7 @@
       </p:sp>
       <p:sp>
         <p:nvSpPr>
-          <p:cNvPr id="13" name="circ-49"/>
+          <p:cNvPr id="13" name="circ-50"/>
           <p:cNvSpPr/>
           <p:nvPr/>
         </p:nvSpPr>
@@ -11151,7 +12402,7 @@
       </p:sp>
       <p:pic>
         <p:nvPicPr>
-          <p:cNvPr id="14" name="icon-50" descr="icons/search_b.png">    </p:cNvPr>
+          <p:cNvPr id="14" name="icon-51" descr="icons/search_b.png">    </p:cNvPr>
           <p:cNvPicPr>
             <a:picLocks noChangeAspect="1"/>
           </p:cNvPicPr>
@@ -11175,7 +12426,7 @@
       </p:pic>
       <p:sp>
         <p:nvSpPr>
-          <p:cNvPr id="15" name="dot-51"/>
+          <p:cNvPr id="15" name="dot-52"/>
           <p:cNvSpPr/>
           <p:nvPr/>
         </p:nvSpPr>
@@ -11200,7 +12451,7 @@
       </p:sp>
       <p:sp>
         <p:nvSpPr>
-          <p:cNvPr id="16" name="text-52"/>
+          <p:cNvPr id="16" name="text-53"/>
           <p:cNvSpPr txBox="1"/>
           <p:nvPr/>
         </p:nvSpPr>
@@ -11236,7 +12487,7 @@
       </p:sp>
       <p:sp>
         <p:nvSpPr>
-          <p:cNvPr id="17" name="text-53"/>
+          <p:cNvPr id="17" name="text-54"/>
           <p:cNvSpPr txBox="1"/>
           <p:nvPr/>
         </p:nvSpPr>
@@ -11272,7 +12523,7 @@
       </p:sp>
       <p:sp>
         <p:nvSpPr>
-          <p:cNvPr id="18" name="text-54"/>
+          <p:cNvPr id="18" name="text-55"/>
           <p:cNvSpPr txBox="1"/>
           <p:nvPr/>
         </p:nvSpPr>
@@ -11311,7 +12562,7 @@
       </p:sp>
       <p:pic>
         <p:nvPicPr>
-          <p:cNvPr id="19" name="icon-55" descr="icons/arrow_b.png">    </p:cNvPr>
+          <p:cNvPr id="19" name="icon-56" descr="icons/arrow_b.png">    </p:cNvPr>
           <p:cNvPicPr>
             <a:picLocks noChangeAspect="1"/>
           </p:cNvPicPr>
@@ -11335,7 +12586,7 @@
       </p:pic>
       <p:sp>
         <p:nvSpPr>
-          <p:cNvPr id="20" name="card-56"/>
+          <p:cNvPr id="20" name="card-57"/>
           <p:cNvSpPr/>
           <p:nvPr/>
         </p:nvSpPr>
@@ -11362,7 +12613,7 @@
       </p:sp>
       <p:sp>
         <p:nvSpPr>
-          <p:cNvPr id="21" name="circ-57"/>
+          <p:cNvPr id="21" name="circ-58"/>
           <p:cNvSpPr/>
           <p:nvPr/>
         </p:nvSpPr>
@@ -11387,7 +12638,7 @@
       </p:sp>
       <p:pic>
         <p:nvPicPr>
-          <p:cNvPr id="22" name="icon-58" descr="icons/spark_b.png">    </p:cNvPr>
+          <p:cNvPr id="22" name="icon-59" descr="icons/spark_b.png">    </p:cNvPr>
           <p:cNvPicPr>
             <a:picLocks noChangeAspect="1"/>
           </p:cNvPicPr>
@@ -11411,7 +12662,7 @@
       </p:pic>
       <p:sp>
         <p:nvSpPr>
-          <p:cNvPr id="23" name="dot-59"/>
+          <p:cNvPr id="23" name="dot-60"/>
           <p:cNvSpPr/>
           <p:nvPr/>
         </p:nvSpPr>
@@ -11436,7 +12687,7 @@
       </p:sp>
       <p:sp>
         <p:nvSpPr>
-          <p:cNvPr id="24" name="text-60"/>
+          <p:cNvPr id="24" name="text-61"/>
           <p:cNvSpPr txBox="1"/>
           <p:nvPr/>
         </p:nvSpPr>
@@ -11472,7 +12723,7 @@
       </p:sp>
       <p:sp>
         <p:nvSpPr>
-          <p:cNvPr id="25" name="text-61"/>
+          <p:cNvPr id="25" name="text-62"/>
           <p:cNvSpPr txBox="1"/>
           <p:nvPr/>
         </p:nvSpPr>
@@ -11508,7 +12759,7 @@
       </p:sp>
       <p:sp>
         <p:nvSpPr>
-          <p:cNvPr id="26" name="text-62"/>
+          <p:cNvPr id="26" name="text-63"/>
           <p:cNvSpPr txBox="1"/>
           <p:nvPr/>
         </p:nvSpPr>
@@ -11547,7 +12798,7 @@
       </p:sp>
       <p:pic>
         <p:nvPicPr>
-          <p:cNvPr id="27" name="icon-63" descr="icons/arrow_b.png">    </p:cNvPr>
+          <p:cNvPr id="27" name="icon-64" descr="icons/arrow_b.png">    </p:cNvPr>
           <p:cNvPicPr>
             <a:picLocks noChangeAspect="1"/>
           </p:cNvPicPr>
@@ -11571,7 +12822,7 @@
       </p:pic>
       <p:sp>
         <p:nvSpPr>
-          <p:cNvPr id="28" name="card-64"/>
+          <p:cNvPr id="28" name="card-65"/>
           <p:cNvSpPr/>
           <p:nvPr/>
         </p:nvSpPr>
@@ -11598,7 +12849,7 @@
       </p:sp>
       <p:sp>
         <p:nvSpPr>
-          <p:cNvPr id="29" name="circ-65"/>
+          <p:cNvPr id="29" name="circ-66"/>
           <p:cNvSpPr/>
           <p:nvPr/>
         </p:nvSpPr>
@@ -11623,7 +12874,7 @@
       </p:sp>
       <p:pic>
         <p:nvPicPr>
-          <p:cNvPr id="30" name="icon-66" descr="icons/printer_b.png">    </p:cNvPr>
+          <p:cNvPr id="30" name="icon-67" descr="icons/printer_b.png">    </p:cNvPr>
           <p:cNvPicPr>
             <a:picLocks noChangeAspect="1"/>
           </p:cNvPicPr>
@@ -11647,7 +12898,7 @@
       </p:pic>
       <p:sp>
         <p:nvSpPr>
-          <p:cNvPr id="31" name="dot-67"/>
+          <p:cNvPr id="31" name="dot-68"/>
           <p:cNvSpPr/>
           <p:nvPr/>
         </p:nvSpPr>
@@ -11672,7 +12923,7 @@
       </p:sp>
       <p:sp>
         <p:nvSpPr>
-          <p:cNvPr id="32" name="text-68"/>
+          <p:cNvPr id="32" name="text-69"/>
           <p:cNvSpPr txBox="1"/>
           <p:nvPr/>
         </p:nvSpPr>
@@ -11708,7 +12959,7 @@
       </p:sp>
       <p:sp>
         <p:nvSpPr>
-          <p:cNvPr id="33" name="text-69"/>
+          <p:cNvPr id="33" name="text-70"/>
           <p:cNvSpPr txBox="1"/>
           <p:nvPr/>
         </p:nvSpPr>
@@ -11744,7 +12995,7 @@
       </p:sp>
       <p:sp>
         <p:nvSpPr>
-          <p:cNvPr id="34" name="text-70"/>
+          <p:cNvPr id="34" name="text-71"/>
           <p:cNvSpPr txBox="1"/>
           <p:nvPr/>
         </p:nvSpPr>
@@ -11783,7 +13034,7 @@
       </p:sp>
       <p:sp>
         <p:nvSpPr>
-          <p:cNvPr id="35" name="card-71"/>
+          <p:cNvPr id="35" name="card-72"/>
           <p:cNvSpPr/>
           <p:nvPr/>
         </p:nvSpPr>
@@ -11810,7 +13061,7 @@
       </p:sp>
       <p:pic>
         <p:nvPicPr>
-          <p:cNvPr id="36" name="icon-72" descr="icons/lock_b.png">    </p:cNvPr>
+          <p:cNvPr id="36" name="icon-73" descr="icons/lock_b.png">    </p:cNvPr>
           <p:cNvPicPr>
             <a:picLocks noChangeAspect="1"/>
           </p:cNvPicPr>
@@ -11834,7 +13085,7 @@
       </p:pic>
       <p:sp>
         <p:nvSpPr>
-          <p:cNvPr id="37" name="text-73"/>
+          <p:cNvPr id="37" name="text-74"/>
           <p:cNvSpPr txBox="1"/>
           <p:nvPr/>
         </p:nvSpPr>
@@ -12016,7 +13267,7 @@
       </p:sp>
       <p:sp>
         <p:nvSpPr>
-          <p:cNvPr id="4" name="frame-74"/>
+          <p:cNvPr id="4" name="frame-75"/>
           <p:cNvSpPr/>
           <p:nvPr/>
         </p:nvSpPr>
@@ -12050,7 +13301,7 @@
       </p:sp>
       <p:pic>
         <p:nvPicPr>
-          <p:cNvPr id="5" name="pic-75" descr="shots/crop_panel_start.png">    </p:cNvPr>
+          <p:cNvPr id="5" name="pic-76" descr="shots/crop_panel_start.png">    </p:cNvPr>
           <p:cNvPicPr>
             <a:picLocks noChangeAspect="1"/>
           </p:cNvPicPr>
@@ -12074,7 +13325,7 @@
       </p:pic>
       <p:sp>
         <p:nvSpPr>
-          <p:cNvPr id="6" name="dot-76"/>
+          <p:cNvPr id="6" name="dot-77"/>
           <p:cNvSpPr/>
           <p:nvPr/>
         </p:nvSpPr>
@@ -12099,7 +13350,7 @@
       </p:sp>
       <p:sp>
         <p:nvSpPr>
-          <p:cNvPr id="7" name="text-77"/>
+          <p:cNvPr id="7" name="text-78"/>
           <p:cNvSpPr txBox="1"/>
           <p:nvPr/>
         </p:nvSpPr>
@@ -12135,7 +13386,7 @@
       </p:sp>
       <p:sp>
         <p:nvSpPr>
-          <p:cNvPr id="8" name="text-78"/>
+          <p:cNvPr id="8" name="text-79"/>
           <p:cNvSpPr txBox="1"/>
           <p:nvPr/>
         </p:nvSpPr>
@@ -12171,7 +13422,7 @@
       </p:sp>
       <p:sp>
         <p:nvSpPr>
-          <p:cNvPr id="9" name="text-79"/>
+          <p:cNvPr id="9" name="text-80"/>
           <p:cNvSpPr txBox="1"/>
           <p:nvPr/>
         </p:nvSpPr>
@@ -12207,7 +13458,7 @@
       </p:sp>
       <p:sp>
         <p:nvSpPr>
-          <p:cNvPr id="10" name="dot-80"/>
+          <p:cNvPr id="10" name="dot-81"/>
           <p:cNvSpPr/>
           <p:nvPr/>
         </p:nvSpPr>
@@ -12232,7 +13483,7 @@
       </p:sp>
       <p:sp>
         <p:nvSpPr>
-          <p:cNvPr id="11" name="text-81"/>
+          <p:cNvPr id="11" name="text-82"/>
           <p:cNvSpPr txBox="1"/>
           <p:nvPr/>
         </p:nvSpPr>
@@ -12268,7 +13519,7 @@
       </p:sp>
       <p:sp>
         <p:nvSpPr>
-          <p:cNvPr id="12" name="text-82"/>
+          <p:cNvPr id="12" name="text-83"/>
           <p:cNvSpPr txBox="1"/>
           <p:nvPr/>
         </p:nvSpPr>
@@ -12304,7 +13555,7 @@
       </p:sp>
       <p:sp>
         <p:nvSpPr>
-          <p:cNvPr id="13" name="text-83"/>
+          <p:cNvPr id="13" name="text-84"/>
           <p:cNvSpPr txBox="1"/>
           <p:nvPr/>
         </p:nvSpPr>
@@ -12340,7 +13591,7 @@
       </p:sp>
       <p:sp>
         <p:nvSpPr>
-          <p:cNvPr id="14" name="dot-84"/>
+          <p:cNvPr id="14" name="dot-85"/>
           <p:cNvSpPr/>
           <p:nvPr/>
         </p:nvSpPr>
@@ -12365,7 +13616,7 @@
       </p:sp>
       <p:sp>
         <p:nvSpPr>
-          <p:cNvPr id="15" name="text-85"/>
+          <p:cNvPr id="15" name="text-86"/>
           <p:cNvSpPr txBox="1"/>
           <p:nvPr/>
         </p:nvSpPr>
@@ -12401,7 +13652,7 @@
       </p:sp>
       <p:sp>
         <p:nvSpPr>
-          <p:cNvPr id="16" name="text-86"/>
+          <p:cNvPr id="16" name="text-87"/>
           <p:cNvSpPr txBox="1"/>
           <p:nvPr/>
         </p:nvSpPr>
@@ -12437,7 +13688,7 @@
       </p:sp>
       <p:sp>
         <p:nvSpPr>
-          <p:cNvPr id="17" name="text-87"/>
+          <p:cNvPr id="17" name="text-88"/>
           <p:cNvSpPr txBox="1"/>
           <p:nvPr/>
         </p:nvSpPr>
@@ -12473,7 +13724,7 @@
       </p:sp>
       <p:sp>
         <p:nvSpPr>
-          <p:cNvPr id="18" name="dot-88"/>
+          <p:cNvPr id="18" name="dot-89"/>
           <p:cNvSpPr/>
           <p:nvPr/>
         </p:nvSpPr>
@@ -12498,7 +13749,7 @@
       </p:sp>
       <p:sp>
         <p:nvSpPr>
-          <p:cNvPr id="19" name="text-89"/>
+          <p:cNvPr id="19" name="text-90"/>
           <p:cNvSpPr txBox="1"/>
           <p:nvPr/>
         </p:nvSpPr>
@@ -12534,7 +13785,7 @@
       </p:sp>
       <p:sp>
         <p:nvSpPr>
-          <p:cNvPr id="20" name="text-90"/>
+          <p:cNvPr id="20" name="text-91"/>
           <p:cNvSpPr txBox="1"/>
           <p:nvPr/>
         </p:nvSpPr>
@@ -12570,7 +13821,7 @@
       </p:sp>
       <p:sp>
         <p:nvSpPr>
-          <p:cNvPr id="21" name="text-91"/>
+          <p:cNvPr id="21" name="text-92"/>
           <p:cNvSpPr txBox="1"/>
           <p:nvPr/>
         </p:nvSpPr>
@@ -12606,7 +13857,7 @@
       </p:sp>
       <p:sp>
         <p:nvSpPr>
-          <p:cNvPr id="22" name="text-92"/>
+          <p:cNvPr id="22" name="text-93"/>
           <p:cNvSpPr txBox="1"/>
           <p:nvPr/>
         </p:nvSpPr>
@@ -12788,7 +14039,7 @@
       </p:sp>
       <p:sp>
         <p:nvSpPr>
-          <p:cNvPr id="4" name="card-93"/>
+          <p:cNvPr id="4" name="card-94"/>
           <p:cNvSpPr/>
           <p:nvPr/>
         </p:nvSpPr>
@@ -12815,7 +14066,7 @@
       </p:sp>
       <p:pic>
         <p:nvPicPr>
-          <p:cNvPr id="5" name="icon-94" descr="icons/upload_b.png">    </p:cNvPr>
+          <p:cNvPr id="5" name="icon-95" descr="icons/upload_b.png">    </p:cNvPr>
           <p:cNvPicPr>
             <a:picLocks noChangeAspect="1"/>
           </p:cNvPicPr>
@@ -12839,7 +14090,7 @@
       </p:pic>
       <p:sp>
         <p:nvSpPr>
-          <p:cNvPr id="6" name="text-95"/>
+          <p:cNvPr id="6" name="text-96"/>
           <p:cNvSpPr txBox="1"/>
           <p:nvPr/>
         </p:nvSpPr>
@@ -12875,7 +14126,7 @@
       </p:sp>
       <p:sp>
         <p:nvSpPr>
-          <p:cNvPr id="7" name="text-96"/>
+          <p:cNvPr id="7" name="text-97"/>
           <p:cNvSpPr txBox="1"/>
           <p:nvPr/>
         </p:nvSpPr>
@@ -12911,7 +14162,7 @@
       </p:sp>
       <p:sp>
         <p:nvSpPr>
-          <p:cNvPr id="8" name="card-97"/>
+          <p:cNvPr id="8" name="card-98"/>
           <p:cNvSpPr/>
           <p:nvPr/>
         </p:nvSpPr>
@@ -12938,7 +14189,7 @@
       </p:sp>
       <p:pic>
         <p:nvPicPr>
-          <p:cNvPr id="9" name="icon-98" descr="icons/eye_b.png">    </p:cNvPr>
+          <p:cNvPr id="9" name="icon-99" descr="icons/eye_b.png">    </p:cNvPr>
           <p:cNvPicPr>
             <a:picLocks noChangeAspect="1"/>
           </p:cNvPicPr>
@@ -12962,7 +14213,7 @@
       </p:pic>
       <p:sp>
         <p:nvSpPr>
-          <p:cNvPr id="10" name="text-99"/>
+          <p:cNvPr id="10" name="text-100"/>
           <p:cNvSpPr txBox="1"/>
           <p:nvPr/>
         </p:nvSpPr>
@@ -12998,7 +14249,7 @@
       </p:sp>
       <p:sp>
         <p:nvSpPr>
-          <p:cNvPr id="11" name="text-100"/>
+          <p:cNvPr id="11" name="text-101"/>
           <p:cNvSpPr txBox="1"/>
           <p:nvPr/>
         </p:nvSpPr>
@@ -13034,7 +14285,7 @@
       </p:sp>
       <p:sp>
         <p:nvSpPr>
-          <p:cNvPr id="12" name="card-101"/>
+          <p:cNvPr id="12" name="card-102"/>
           <p:cNvSpPr/>
           <p:nvPr/>
         </p:nvSpPr>
@@ -13061,7 +14312,7 @@
       </p:sp>
       <p:pic>
         <p:nvPicPr>
-          <p:cNvPr id="13" name="icon-102" descr="icons/printer_b.png">    </p:cNvPr>
+          <p:cNvPr id="13" name="icon-103" descr="icons/printer_b.png">    </p:cNvPr>
           <p:cNvPicPr>
             <a:picLocks noChangeAspect="1"/>
           </p:cNvPicPr>
@@ -13085,7 +14336,7 @@
       </p:pic>
       <p:sp>
         <p:nvSpPr>
-          <p:cNvPr id="14" name="text-103"/>
+          <p:cNvPr id="14" name="text-104"/>
           <p:cNvSpPr txBox="1"/>
           <p:nvPr/>
         </p:nvSpPr>
@@ -13121,7 +14372,7 @@
       </p:sp>
       <p:sp>
         <p:nvSpPr>
-          <p:cNvPr id="15" name="text-104"/>
+          <p:cNvPr id="15" name="text-105"/>
           <p:cNvSpPr txBox="1"/>
           <p:nvPr/>
         </p:nvSpPr>
@@ -13157,7 +14408,7 @@
       </p:sp>
       <p:sp>
         <p:nvSpPr>
-          <p:cNvPr id="16" name="frame-105"/>
+          <p:cNvPr id="16" name="frame-106"/>
           <p:cNvSpPr/>
           <p:nvPr/>
         </p:nvSpPr>
@@ -13191,7 +14442,7 @@
       </p:sp>
       <p:pic>
         <p:nvPicPr>
-          <p:cNvPr id="17" name="pic-106" descr="shots/crop_status.png">    </p:cNvPr>
+          <p:cNvPr id="17" name="pic-107" descr="shots/crop_status.png">    </p:cNvPr>
           <p:cNvPicPr>
             <a:picLocks noChangeAspect="1"/>
           </p:cNvPicPr>
@@ -13215,7 +14466,7 @@
       </p:pic>
       <p:sp>
         <p:nvSpPr>
-          <p:cNvPr id="18" name="badge-107"/>
+          <p:cNvPr id="18" name="badge-108"/>
           <p:cNvSpPr/>
           <p:nvPr/>
         </p:nvSpPr>
@@ -13242,7 +14493,7 @@
       </p:sp>
       <p:sp>
         <p:nvSpPr>
-          <p:cNvPr id="19" name="text-108"/>
+          <p:cNvPr id="19" name="text-109"/>
           <p:cNvSpPr txBox="1"/>
           <p:nvPr/>
         </p:nvSpPr>
@@ -13278,7 +14529,7 @@
       </p:sp>
       <p:sp>
         <p:nvSpPr>
-          <p:cNvPr id="20" name="text-109"/>
+          <p:cNvPr id="20" name="text-110"/>
           <p:cNvSpPr txBox="1"/>
           <p:nvPr/>
         </p:nvSpPr>
@@ -13460,7 +14711,7 @@
       </p:sp>
       <p:sp>
         <p:nvSpPr>
-          <p:cNvPr id="4" name="frame-110"/>
+          <p:cNvPr id="4" name="frame-111"/>
           <p:cNvSpPr/>
           <p:nvPr/>
         </p:nvSpPr>
@@ -13494,7 +14745,7 @@
       </p:sp>
       <p:pic>
         <p:nvPicPr>
-          <p:cNvPr id="5" name="pic-111" descr="shots/page_01.png">    </p:cNvPr>
+          <p:cNvPr id="5" name="pic-112" descr="shots/page_01.png">    </p:cNvPr>
           <p:cNvPicPr>
             <a:picLocks noChangeAspect="1"/>
           </p:cNvPicPr>
@@ -13518,7 +14769,7 @@
       </p:pic>
       <p:sp>
         <p:nvSpPr>
-          <p:cNvPr id="6" name="text-112"/>
+          <p:cNvPr id="6" name="text-113"/>
           <p:cNvSpPr txBox="1"/>
           <p:nvPr/>
         </p:nvSpPr>
@@ -13554,7 +14805,7 @@
       </p:sp>
       <p:sp>
         <p:nvSpPr>
-          <p:cNvPr id="7" name="frame-113"/>
+          <p:cNvPr id="7" name="frame-114"/>
           <p:cNvSpPr/>
           <p:nvPr/>
         </p:nvSpPr>
@@ -13588,7 +14839,7 @@
       </p:sp>
       <p:pic>
         <p:nvPicPr>
-          <p:cNvPr id="8" name="pic-114" descr="shots/page_02.png">    </p:cNvPr>
+          <p:cNvPr id="8" name="pic-115" descr="shots/page_02.png">    </p:cNvPr>
           <p:cNvPicPr>
             <a:picLocks noChangeAspect="1"/>
           </p:cNvPicPr>
@@ -13612,7 +14863,7 @@
       </p:pic>
       <p:sp>
         <p:nvSpPr>
-          <p:cNvPr id="9" name="text-115"/>
+          <p:cNvPr id="9" name="text-116"/>
           <p:cNvSpPr txBox="1"/>
           <p:nvPr/>
         </p:nvSpPr>
@@ -13648,7 +14899,7 @@
       </p:sp>
       <p:sp>
         <p:nvSpPr>
-          <p:cNvPr id="10" name="frame-116"/>
+          <p:cNvPr id="10" name="frame-117"/>
           <p:cNvSpPr/>
           <p:nvPr/>
         </p:nvSpPr>
@@ -13682,7 +14933,7 @@
       </p:sp>
       <p:pic>
         <p:nvPicPr>
-          <p:cNvPr id="11" name="pic-117" descr="shots/page_03.png">    </p:cNvPr>
+          <p:cNvPr id="11" name="pic-118" descr="shots/page_03.png">    </p:cNvPr>
           <p:cNvPicPr>
             <a:picLocks noChangeAspect="1"/>
           </p:cNvPicPr>
@@ -13706,7 +14957,7 @@
       </p:pic>
       <p:sp>
         <p:nvSpPr>
-          <p:cNvPr id="12" name="text-118"/>
+          <p:cNvPr id="12" name="text-119"/>
           <p:cNvSpPr txBox="1"/>
           <p:nvPr/>
         </p:nvSpPr>
@@ -13742,7 +14993,7 @@
       </p:sp>
       <p:sp>
         <p:nvSpPr>
-          <p:cNvPr id="13" name="frame-119"/>
+          <p:cNvPr id="13" name="frame-120"/>
           <p:cNvSpPr/>
           <p:nvPr/>
         </p:nvSpPr>
@@ -13776,7 +15027,7 @@
       </p:sp>
       <p:pic>
         <p:nvPicPr>
-          <p:cNvPr id="14" name="pic-120" descr="shots/page_04.png">    </p:cNvPr>
+          <p:cNvPr id="14" name="pic-121" descr="shots/page_04.png">    </p:cNvPr>
           <p:cNvPicPr>
             <a:picLocks noChangeAspect="1"/>
           </p:cNvPicPr>
@@ -13800,7 +15051,7 @@
       </p:pic>
       <p:sp>
         <p:nvSpPr>
-          <p:cNvPr id="15" name="text-121"/>
+          <p:cNvPr id="15" name="text-122"/>
           <p:cNvSpPr txBox="1"/>
           <p:nvPr/>
         </p:nvSpPr>
@@ -13836,7 +15087,7 @@
       </p:sp>
       <p:sp>
         <p:nvSpPr>
-          <p:cNvPr id="16" name="frame-122"/>
+          <p:cNvPr id="16" name="frame-123"/>
           <p:cNvSpPr/>
           <p:nvPr/>
         </p:nvSpPr>
@@ -13870,7 +15121,7 @@
       </p:sp>
       <p:pic>
         <p:nvPicPr>
-          <p:cNvPr id="17" name="pic-123" descr="shots/page_08.png">    </p:cNvPr>
+          <p:cNvPr id="17" name="pic-124" descr="shots/page_08.png">    </p:cNvPr>
           <p:cNvPicPr>
             <a:picLocks noChangeAspect="1"/>
           </p:cNvPicPr>
@@ -13894,7 +15145,7 @@
       </p:pic>
       <p:sp>
         <p:nvSpPr>
-          <p:cNvPr id="18" name="text-124"/>
+          <p:cNvPr id="18" name="text-125"/>
           <p:cNvSpPr txBox="1"/>
           <p:nvPr/>
         </p:nvSpPr>
@@ -13930,7 +15181,7 @@
       </p:sp>
       <p:sp>
         <p:nvSpPr>
-          <p:cNvPr id="19" name="frame-125"/>
+          <p:cNvPr id="19" name="frame-126"/>
           <p:cNvSpPr/>
           <p:nvPr/>
         </p:nvSpPr>
@@ -13964,7 +15215,7 @@
       </p:sp>
       <p:pic>
         <p:nvPicPr>
-          <p:cNvPr id="20" name="pic-126" descr="shots/page_19.png">    </p:cNvPr>
+          <p:cNvPr id="20" name="pic-127" descr="shots/page_19.png">    </p:cNvPr>
           <p:cNvPicPr>
             <a:picLocks noChangeAspect="1"/>
           </p:cNvPicPr>
@@ -13988,7 +15239,7 @@
       </p:pic>
       <p:sp>
         <p:nvSpPr>
-          <p:cNvPr id="21" name="text-127"/>
+          <p:cNvPr id="21" name="text-128"/>
           <p:cNvSpPr txBox="1"/>
           <p:nvPr/>
         </p:nvSpPr>
@@ -14024,7 +15275,7 @@
       </p:sp>
       <p:pic>
         <p:nvPicPr>
-          <p:cNvPr id="22" name="icon-128" descr="icons/layers_b.png">    </p:cNvPr>
+          <p:cNvPr id="22" name="icon-129" descr="icons/layers_b.png">    </p:cNvPr>
           <p:cNvPicPr>
             <a:picLocks noChangeAspect="1"/>
           </p:cNvPicPr>
@@ -14048,7 +15299,7 @@
       </p:pic>
       <p:sp>
         <p:nvSpPr>
-          <p:cNvPr id="23" name="text-129"/>
+          <p:cNvPr id="23" name="text-130"/>
           <p:cNvSpPr txBox="1"/>
           <p:nvPr/>
         </p:nvSpPr>
@@ -14084,7 +15335,7 @@
       </p:sp>
       <p:sp>
         <p:nvSpPr>
-          <p:cNvPr id="24" name="text-130"/>
+          <p:cNvPr id="24" name="text-131"/>
           <p:cNvSpPr txBox="1"/>
           <p:nvPr/>
         </p:nvSpPr>
@@ -14120,7 +15371,7 @@
       </p:sp>
       <p:pic>
         <p:nvPicPr>
-          <p:cNvPr id="25" name="icon-131" descr="icons/tag_b.png">    </p:cNvPr>
+          <p:cNvPr id="25" name="icon-132" descr="icons/tag_b.png">    </p:cNvPr>
           <p:cNvPicPr>
             <a:picLocks noChangeAspect="1"/>
           </p:cNvPicPr>
@@ -14144,7 +15395,7 @@
       </p:pic>
       <p:sp>
         <p:nvSpPr>
-          <p:cNvPr id="26" name="text-132"/>
+          <p:cNvPr id="26" name="text-133"/>
           <p:cNvSpPr txBox="1"/>
           <p:nvPr/>
         </p:nvSpPr>
@@ -14180,7 +15431,7 @@
       </p:sp>
       <p:sp>
         <p:nvSpPr>
-          <p:cNvPr id="27" name="text-133"/>
+          <p:cNvPr id="27" name="text-134"/>
           <p:cNvSpPr txBox="1"/>
           <p:nvPr/>
         </p:nvSpPr>
@@ -14216,7 +15467,7 @@
       </p:sp>
       <p:pic>
         <p:nvPicPr>
-          <p:cNvPr id="28" name="icon-134" descr="icons/puzzle_b.png">    </p:cNvPr>
+          <p:cNvPr id="28" name="icon-135" descr="icons/puzzle_b.png">    </p:cNvPr>
           <p:cNvPicPr>
             <a:picLocks noChangeAspect="1"/>
           </p:cNvPicPr>
@@ -14240,7 +15491,7 @@
       </p:pic>
       <p:sp>
         <p:nvSpPr>
-          <p:cNvPr id="29" name="text-135"/>
+          <p:cNvPr id="29" name="text-136"/>
           <p:cNvSpPr txBox="1"/>
           <p:nvPr/>
         </p:nvSpPr>
@@ -14276,7 +15527,7 @@
       </p:sp>
       <p:sp>
         <p:nvSpPr>
-          <p:cNvPr id="30" name="text-136"/>
+          <p:cNvPr id="30" name="text-137"/>
           <p:cNvSpPr txBox="1"/>
           <p:nvPr/>
         </p:nvSpPr>
@@ -14458,7 +15709,7 @@
       </p:sp>
       <p:sp>
         <p:nvSpPr>
-          <p:cNvPr id="4" name="frame-137"/>
+          <p:cNvPr id="4" name="frame-138"/>
           <p:cNvSpPr/>
           <p:nvPr/>
         </p:nvSpPr>
@@ -14492,7 +15743,7 @@
       </p:sp>
       <p:pic>
         <p:nvPicPr>
-          <p:cNvPr id="5" name="pic-138" descr="shots/page_01.png">    </p:cNvPr>
+          <p:cNvPr id="5" name="pic-139" descr="shots/page_01.png">    </p:cNvPr>
           <p:cNvPicPr>
             <a:picLocks noChangeAspect="1"/>
           </p:cNvPicPr>
@@ -14516,7 +15767,7 @@
       </p:pic>
       <p:sp>
         <p:nvSpPr>
-          <p:cNvPr id="6" name="frame-139"/>
+          <p:cNvPr id="6" name="frame-140"/>
           <p:cNvSpPr/>
           <p:nvPr/>
         </p:nvSpPr>
@@ -14550,7 +15801,7 @@
       </p:sp>
       <p:pic>
         <p:nvPicPr>
-          <p:cNvPr id="7" name="pic-140" descr="shots/page_02.png">    </p:cNvPr>
+          <p:cNvPr id="7" name="pic-141" descr="shots/page_02.png">    </p:cNvPr>
           <p:cNvPicPr>
             <a:picLocks noChangeAspect="1"/>
           </p:cNvPicPr>
@@ -14574,7 +15825,7 @@
       </p:pic>
       <p:sp>
         <p:nvSpPr>
-          <p:cNvPr id="8" name="text-141"/>
+          <p:cNvPr id="8" name="text-142"/>
           <p:cNvSpPr txBox="1"/>
           <p:nvPr/>
         </p:nvSpPr>
@@ -14610,7 +15861,7 @@
       </p:sp>
       <p:sp>
         <p:nvSpPr>
-          <p:cNvPr id="9" name="text-142"/>
+          <p:cNvPr id="9" name="text-143"/>
           <p:cNvSpPr txBox="1"/>
           <p:nvPr/>
         </p:nvSpPr>
@@ -14646,7 +15897,7 @@
       </p:sp>
       <p:sp>
         <p:nvSpPr>
-          <p:cNvPr id="10" name="text-143"/>
+          <p:cNvPr id="10" name="text-144"/>
           <p:cNvSpPr txBox="1"/>
           <p:nvPr/>
         </p:nvSpPr>
@@ -14682,7 +15933,7 @@
       </p:sp>
       <p:sp>
         <p:nvSpPr>
-          <p:cNvPr id="11" name="text-144"/>
+          <p:cNvPr id="11" name="text-145"/>
           <p:cNvSpPr txBox="1"/>
           <p:nvPr/>
         </p:nvSpPr>
@@ -14718,7 +15969,7 @@
       </p:sp>
       <p:sp>
         <p:nvSpPr>
-          <p:cNvPr id="12" name="text-145"/>
+          <p:cNvPr id="12" name="text-146"/>
           <p:cNvSpPr txBox="1"/>
           <p:nvPr/>
         </p:nvSpPr>
@@ -14754,7 +16005,7 @@
       </p:sp>
       <p:sp>
         <p:nvSpPr>
-          <p:cNvPr id="13" name="text-146"/>
+          <p:cNvPr id="13" name="text-147"/>
           <p:cNvSpPr txBox="1"/>
           <p:nvPr/>
         </p:nvSpPr>
@@ -14790,7 +16041,7 @@
       </p:sp>
       <p:sp>
         <p:nvSpPr>
-          <p:cNvPr id="14" name="text-147"/>
+          <p:cNvPr id="14" name="text-148"/>
           <p:cNvSpPr txBox="1"/>
           <p:nvPr/>
         </p:nvSpPr>
@@ -14826,7 +16077,7 @@
       </p:sp>
       <p:sp>
         <p:nvSpPr>
-          <p:cNvPr id="15" name="text-148"/>
+          <p:cNvPr id="15" name="text-149"/>
           <p:cNvSpPr txBox="1"/>
           <p:nvPr/>
         </p:nvSpPr>
@@ -15008,7 +16259,7 @@
       </p:sp>
       <p:sp>
         <p:nvSpPr>
-          <p:cNvPr id="4" name="frame-149"/>
+          <p:cNvPr id="4" name="frame-150"/>
           <p:cNvSpPr/>
           <p:nvPr/>
         </p:nvSpPr>
@@ -15042,7 +16293,7 @@
       </p:sp>
       <p:pic>
         <p:nvPicPr>
-          <p:cNvPr id="5" name="pic-150" descr="shots/crop_tiles.png">    </p:cNvPr>
+          <p:cNvPr id="5" name="pic-151" descr="shots/crop_tiles.png">    </p:cNvPr>
           <p:cNvPicPr>
             <a:picLocks noChangeAspect="1"/>
           </p:cNvPicPr>
@@ -15066,7 +16317,7 @@
       </p:pic>
       <p:sp>
         <p:nvSpPr>
-          <p:cNvPr id="6" name="frame-151"/>
+          <p:cNvPr id="6" name="frame-152"/>
           <p:cNvSpPr/>
           <p:nvPr/>
         </p:nvSpPr>
@@ -15100,7 +16351,7 @@
       </p:sp>
       <p:pic>
         <p:nvPicPr>
-          <p:cNvPr id="7" name="pic-152" descr="shots/crop_firstyear.png">    </p:cNvPr>
+          <p:cNvPr id="7" name="pic-153" descr="shots/crop_firstyear.png">    </p:cNvPr>
           <p:cNvPicPr>
             <a:picLocks noChangeAspect="1"/>
           </p:cNvPicPr>
@@ -15124,7 +16375,7 @@
       </p:pic>
       <p:pic>
         <p:nvPicPr>
-          <p:cNvPr id="8" name="icon-153" descr="icons/check_g.png">    </p:cNvPr>
+          <p:cNvPr id="8" name="icon-154" descr="icons/check_g.png">    </p:cNvPr>
           <p:cNvPicPr>
             <a:picLocks noChangeAspect="1"/>
           </p:cNvPicPr>
@@ -15148,7 +16399,7 @@
       </p:pic>
       <p:sp>
         <p:nvSpPr>
-          <p:cNvPr id="9" name="text-154"/>
+          <p:cNvPr id="9" name="text-155"/>
           <p:cNvSpPr txBox="1"/>
           <p:nvPr/>
         </p:nvSpPr>
@@ -15184,7 +16435,7 @@
       </p:sp>
       <p:sp>
         <p:nvSpPr>
-          <p:cNvPr id="10" name="text-155"/>
+          <p:cNvPr id="10" name="text-156"/>
           <p:cNvSpPr txBox="1"/>
           <p:nvPr/>
         </p:nvSpPr>
@@ -15220,7 +16471,7 @@
       </p:sp>
       <p:pic>
         <p:nvPicPr>
-          <p:cNvPr id="11" name="icon-156" descr="icons/check_g.png">    </p:cNvPr>
+          <p:cNvPr id="11" name="icon-157" descr="icons/check_g.png">    </p:cNvPr>
           <p:cNvPicPr>
             <a:picLocks noChangeAspect="1"/>
           </p:cNvPicPr>
@@ -15244,7 +16495,7 @@
       </p:pic>
       <p:sp>
         <p:nvSpPr>
-          <p:cNvPr id="12" name="text-157"/>
+          <p:cNvPr id="12" name="text-158"/>
           <p:cNvSpPr txBox="1"/>
           <p:nvPr/>
         </p:nvSpPr>
@@ -15280,7 +16531,7 @@
       </p:sp>
       <p:sp>
         <p:nvSpPr>
-          <p:cNvPr id="13" name="text-158"/>
+          <p:cNvPr id="13" name="text-159"/>
           <p:cNvSpPr txBox="1"/>
           <p:nvPr/>
         </p:nvSpPr>
@@ -15316,7 +16567,7 @@
       </p:sp>
       <p:pic>
         <p:nvPicPr>
-          <p:cNvPr id="14" name="icon-159" descr="icons/check_g.png">    </p:cNvPr>
+          <p:cNvPr id="14" name="icon-160" descr="icons/check_g.png">    </p:cNvPr>
           <p:cNvPicPr>
             <a:picLocks noChangeAspect="1"/>
           </p:cNvPicPr>
@@ -15340,7 +16591,7 @@
       </p:pic>
       <p:sp>
         <p:nvSpPr>
-          <p:cNvPr id="15" name="text-160"/>
+          <p:cNvPr id="15" name="text-161"/>
           <p:cNvSpPr txBox="1"/>
           <p:nvPr/>
         </p:nvSpPr>
@@ -15376,7 +16627,7 @@
       </p:sp>
       <p:sp>
         <p:nvSpPr>
-          <p:cNvPr id="16" name="text-161"/>
+          <p:cNvPr id="16" name="text-162"/>
           <p:cNvSpPr txBox="1"/>
           <p:nvPr/>
         </p:nvSpPr>
